--- a/Unterrichtsmaterial_Oberschule_Sachsen/Klasse_8/01_Objektorientierte_Modellierung/05_Praesentationen/01_02_Objektorientierung.pptx
+++ b/Unterrichtsmaterial_Oberschule_Sachsen/Klasse_8/01_Objektorientierte_Modellierung/05_Praesentationen/01_02_Objektorientierung.pptx
@@ -12,11 +12,6 @@
     <p:sldId id="260" r:id="rId12"/>
     <p:sldId id="261" r:id="rId13"/>
     <p:sldId id="262" r:id="rId14"/>
-    <p:sldId id="263" r:id="rId15"/>
-    <p:sldId id="264" r:id="rId16"/>
-    <p:sldId id="265" r:id="rId17"/>
-    <p:sldId id="266" r:id="rId18"/>
-    <p:sldId id="267" r:id="rId19"/>
   </p:sldIdLst>
   <p:sldSz cx="12191695" cy="6858000" type="screen4x3"/>
   <p:notesSz cx="6858000" cy="9144000"/>
@@ -513,217 +508,7 @@
           <a:lstStyle/>
           <a:p>
             <a:r>
-              <a:t>Voraussetzungsfreier Einstieg. Es wird ausdrücklich nicht angenommen, dass die Begriffe in Klasse 7 behandelt wurden. Lehrplanbezug: https://www.schulportal.sachsen.de/lplandb/lehrplan/514</a:t>
-            </a:r>
-          </a:p>
-        </p:txBody>
-      </p:sp>
-      <p:sp>
-        <p:nvSpPr>
-          <p:cNvPr id="4" name="Slide Number Placeholder 3"/>
-          <p:cNvSpPr>
-            <a:spLocks noGrp="1"/>
-          </p:cNvSpPr>
-          <p:nvPr>
-            <p:ph type="sldNum" idx="5" sz="quarter"/>
-          </p:nvPr>
-        </p:nvSpPr>
-        <p:spPr/>
-      </p:sp>
-    </p:spTree>
-  </p:cSld>
-  <p:clrMapOvr>
-    <a:masterClrMapping/>
-  </p:clrMapOvr>
-</p:notes>
-</file>
-
-<file path=ppt/notesSlides/notesSlide10.xml><?xml version="1.0" encoding="utf-8"?>
-<p:notes xmlns:a="http://schemas.openxmlformats.org/drawingml/2006/main" xmlns:p="http://schemas.openxmlformats.org/presentationml/2006/main" xmlns:r="http://schemas.openxmlformats.org/officeDocument/2006/relationships">
-  <p:cSld>
-    <p:spTree>
-      <p:nvGrpSpPr>
-        <p:cNvPr id="1" name=""/>
-        <p:cNvGrpSpPr/>
-        <p:nvPr/>
-      </p:nvGrpSpPr>
-      <p:grpSpPr>
-        <a:xfrm>
-          <a:off x="0" y="0"/>
-          <a:ext cx="0" cy="0"/>
-          <a:chOff x="0" y="0"/>
-          <a:chExt cx="0" cy="0"/>
-        </a:xfrm>
-      </p:grpSpPr>
-      <p:sp>
-        <p:nvSpPr>
-          <p:cNvPr id="2" name="Slide Image Placeholder 1"/>
-          <p:cNvSpPr>
-            <a:spLocks noGrp="1"/>
-          </p:cNvSpPr>
-          <p:nvPr>
-            <p:ph type="sldImg" idx="2"/>
-          </p:nvPr>
-        </p:nvSpPr>
-        <p:spPr/>
-      </p:sp>
-      <p:sp>
-        <p:nvSpPr>
-          <p:cNvPr id="3" name="Notes Placeholder 2"/>
-          <p:cNvSpPr>
-            <a:spLocks noGrp="1"/>
-          </p:cNvSpPr>
-          <p:nvPr>
-            <p:ph type="body" idx="3" sz="quarter"/>
-          </p:nvPr>
-        </p:nvSpPr>
-        <p:spPr/>
-        <p:txBody>
-          <a:bodyPr/>
-          <a:lstStyle/>
-          <a:p>
-            <a:r>
-              <a:t>Partneraufgabe. Hilfen für schwächere Gruppen: Satzstarter und Beispielattribute. Stärkere Gruppen vergleichen zwei Objekte derselben Klasse.</a:t>
-            </a:r>
-          </a:p>
-        </p:txBody>
-      </p:sp>
-      <p:sp>
-        <p:nvSpPr>
-          <p:cNvPr id="4" name="Slide Number Placeholder 3"/>
-          <p:cNvSpPr>
-            <a:spLocks noGrp="1"/>
-          </p:cNvSpPr>
-          <p:nvPr>
-            <p:ph type="sldNum" idx="5" sz="quarter"/>
-          </p:nvPr>
-        </p:nvSpPr>
-        <p:spPr/>
-      </p:sp>
-    </p:spTree>
-  </p:cSld>
-  <p:clrMapOvr>
-    <a:masterClrMapping/>
-  </p:clrMapOvr>
-</p:notes>
-</file>
-
-<file path=ppt/notesSlides/notesSlide11.xml><?xml version="1.0" encoding="utf-8"?>
-<p:notes xmlns:a="http://schemas.openxmlformats.org/drawingml/2006/main" xmlns:p="http://schemas.openxmlformats.org/presentationml/2006/main" xmlns:r="http://schemas.openxmlformats.org/officeDocument/2006/relationships">
-  <p:cSld>
-    <p:spTree>
-      <p:nvGrpSpPr>
-        <p:cNvPr id="1" name=""/>
-        <p:cNvGrpSpPr/>
-        <p:nvPr/>
-      </p:nvGrpSpPr>
-      <p:grpSpPr>
-        <a:xfrm>
-          <a:off x="0" y="0"/>
-          <a:ext cx="0" cy="0"/>
-          <a:chOff x="0" y="0"/>
-          <a:chExt cx="0" cy="0"/>
-        </a:xfrm>
-      </p:grpSpPr>
-      <p:sp>
-        <p:nvSpPr>
-          <p:cNvPr id="2" name="Slide Image Placeholder 1"/>
-          <p:cNvSpPr>
-            <a:spLocks noGrp="1"/>
-          </p:cNvSpPr>
-          <p:nvPr>
-            <p:ph type="sldImg" idx="2"/>
-          </p:nvPr>
-        </p:nvSpPr>
-        <p:spPr/>
-      </p:sp>
-      <p:sp>
-        <p:nvSpPr>
-          <p:cNvPr id="3" name="Notes Placeholder 2"/>
-          <p:cNvSpPr>
-            <a:spLocks noGrp="1"/>
-          </p:cNvSpPr>
-          <p:nvPr>
-            <p:ph type="body" idx="3" sz="quarter"/>
-          </p:nvPr>
-        </p:nvSpPr>
-        <p:spPr/>
-        <p:txBody>
-          <a:bodyPr/>
-          <a:lstStyle/>
-          <a:p>
-            <a:r>
-              <a:t>Überleitung ohne Vorwissen: Von 'Was tut die Methode?' zu 'Welche eindeutigen Schritte sind dafür nötig?'.</a:t>
-            </a:r>
-          </a:p>
-        </p:txBody>
-      </p:sp>
-      <p:sp>
-        <p:nvSpPr>
-          <p:cNvPr id="4" name="Slide Number Placeholder 3"/>
-          <p:cNvSpPr>
-            <a:spLocks noGrp="1"/>
-          </p:cNvSpPr>
-          <p:nvPr>
-            <p:ph type="sldNum" idx="5" sz="quarter"/>
-          </p:nvPr>
-        </p:nvSpPr>
-        <p:spPr/>
-      </p:sp>
-    </p:spTree>
-  </p:cSld>
-  <p:clrMapOvr>
-    <a:masterClrMapping/>
-  </p:clrMapOvr>
-</p:notes>
-</file>
-
-<file path=ppt/notesSlides/notesSlide12.xml><?xml version="1.0" encoding="utf-8"?>
-<p:notes xmlns:a="http://schemas.openxmlformats.org/drawingml/2006/main" xmlns:p="http://schemas.openxmlformats.org/presentationml/2006/main" xmlns:r="http://schemas.openxmlformats.org/officeDocument/2006/relationships">
-  <p:cSld>
-    <p:spTree>
-      <p:nvGrpSpPr>
-        <p:cNvPr id="1" name=""/>
-        <p:cNvGrpSpPr/>
-        <p:nvPr/>
-      </p:nvGrpSpPr>
-      <p:grpSpPr>
-        <a:xfrm>
-          <a:off x="0" y="0"/>
-          <a:ext cx="0" cy="0"/>
-          <a:chOff x="0" y="0"/>
-          <a:chExt cx="0" cy="0"/>
-        </a:xfrm>
-      </p:grpSpPr>
-      <p:sp>
-        <p:nvSpPr>
-          <p:cNvPr id="2" name="Slide Image Placeholder 1"/>
-          <p:cNvSpPr>
-            <a:spLocks noGrp="1"/>
-          </p:cNvSpPr>
-          <p:nvPr>
-            <p:ph type="sldImg" idx="2"/>
-          </p:nvPr>
-        </p:nvSpPr>
-        <p:spPr/>
-      </p:sp>
-      <p:sp>
-        <p:nvSpPr>
-          <p:cNvPr id="3" name="Notes Placeholder 2"/>
-          <p:cNvSpPr>
-            <a:spLocks noGrp="1"/>
-          </p:cNvSpPr>
-          <p:nvPr>
-            <p:ph type="body" idx="3" sz="quarter"/>
-          </p:nvPr>
-        </p:nvSpPr>
-        <p:spPr/>
-        <p:txBody>
-          <a:bodyPr/>
-          <a:lstStyle/>
-          <a:p>
-            <a:r>
-              <a:t>Quellenfolie. Keine internen Repository-, Branch- oder Markdown-Verweise in der Schülerpräsentation.</a:t>
+              <a:t>Nicht auf Klasse 7 aufbauen. Lehrplan: https://www.schulportal.sachsen.de/lplandb/lehrplan/514</a:t>
             </a:r>
           </a:p>
         </p:txBody>
@@ -793,7 +578,7 @@
           <a:lstStyle/>
           <a:p>
             <a:r>
-              <a:t>Einstieg bei null: reale Gegenstände nennen lassen. Noch keine Fachbegriffe voraussetzen. Von beobachtbaren Eigenschaften schrittweise zu Objekt, Attribut und Klasse führen.</a:t>
+              <a:t>Objekte aus der Lebenswelt sammeln; Fachbegriffe erst nach Beispielen einführen.</a:t>
             </a:r>
           </a:p>
         </p:txBody>
@@ -863,7 +648,7 @@
           <a:lstStyle/>
           <a:p>
             <a:r>
-              <a:t>Objektbegriff mit konkreten Gegenständen aufbauen. Wichtig: nicht mit 'Klasse' starten. Schüler sollen zunächst ein einzelnes Ding beschreiben.</a:t>
+              <a:t>Eigenschaft und Wert trennen. Nicht mit Klasse starten.</a:t>
             </a:r>
           </a:p>
         </p:txBody>
@@ -933,7 +718,7 @@
           <a:lstStyle/>
           <a:p>
             <a:r>
-              <a:t>Erst Alltagssprache 'Eigenschaft', dann Fachwort Attribut. Attribut und Attributwert konsequent trennen.</a:t>
+              <a:t>Bauplanmetapher nutzen, aber nicht überdehnen.</a:t>
             </a:r>
           </a:p>
         </p:txBody>
@@ -1003,7 +788,7 @@
           <a:lstStyle/>
           <a:p>
             <a:r>
-              <a:t>Zwei konkrete Objekte vergleichen. Schüler erkennen: gleiche Struktur, unterschiedliche Werte.</a:t>
+              <a:t>Fehlvorstellung Definition=Ausführung vorbereiten.</a:t>
             </a:r>
           </a:p>
         </p:txBody>
@@ -1073,7 +858,7 @@
           <a:lstStyle/>
           <a:p>
             <a:r>
-              <a:t>Bauplanmetapher nutzen und begrenzen: Die Klasse ist die gemeinsame Beschreibung, nicht ein weiteres konkretes Fahrrad.</a:t>
+              <a:t>Partnerarbeit; als Sicherung Objektkarten vergleichen.</a:t>
             </a:r>
           </a:p>
         </p:txBody>
@@ -1143,147 +928,7 @@
           <a:lstStyle/>
           <a:p>
             <a:r>
-              <a:t>Beispiel Lampe: an=false → an=true. Die Zustandsänderung verändert nicht die Klasse.</a:t>
-            </a:r>
-          </a:p>
-        </p:txBody>
-      </p:sp>
-      <p:sp>
-        <p:nvSpPr>
-          <p:cNvPr id="4" name="Slide Number Placeholder 3"/>
-          <p:cNvSpPr>
-            <a:spLocks noGrp="1"/>
-          </p:cNvSpPr>
-          <p:nvPr>
-            <p:ph type="sldNum" idx="5" sz="quarter"/>
-          </p:nvPr>
-        </p:nvSpPr>
-        <p:spPr/>
-      </p:sp>
-    </p:spTree>
-  </p:cSld>
-  <p:clrMapOvr>
-    <a:masterClrMapping/>
-  </p:clrMapOvr>
-</p:notes>
-</file>
-
-<file path=ppt/notesSlides/notesSlide8.xml><?xml version="1.0" encoding="utf-8"?>
-<p:notes xmlns:a="http://schemas.openxmlformats.org/drawingml/2006/main" xmlns:p="http://schemas.openxmlformats.org/presentationml/2006/main" xmlns:r="http://schemas.openxmlformats.org/officeDocument/2006/relationships">
-  <p:cSld>
-    <p:spTree>
-      <p:nvGrpSpPr>
-        <p:cNvPr id="1" name=""/>
-        <p:cNvGrpSpPr/>
-        <p:nvPr/>
-      </p:nvGrpSpPr>
-      <p:grpSpPr>
-        <a:xfrm>
-          <a:off x="0" y="0"/>
-          <a:ext cx="0" cy="0"/>
-          <a:chOff x="0" y="0"/>
-          <a:chExt cx="0" cy="0"/>
-        </a:xfrm>
-      </p:grpSpPr>
-      <p:sp>
-        <p:nvSpPr>
-          <p:cNvPr id="2" name="Slide Image Placeholder 1"/>
-          <p:cNvSpPr>
-            <a:spLocks noGrp="1"/>
-          </p:cNvSpPr>
-          <p:nvPr>
-            <p:ph type="sldImg" idx="2"/>
-          </p:nvPr>
-        </p:nvSpPr>
-        <p:spPr/>
-      </p:sp>
-      <p:sp>
-        <p:nvSpPr>
-          <p:cNvPr id="3" name="Notes Placeholder 2"/>
-          <p:cNvSpPr>
-            <a:spLocks noGrp="1"/>
-          </p:cNvSpPr>
-          <p:nvPr>
-            <p:ph type="body" idx="3" sz="quarter"/>
-          </p:nvPr>
-        </p:nvSpPr>
-        <p:spPr/>
-        <p:txBody>
-          <a:bodyPr/>
-          <a:lstStyle/>
-          <a:p>
-            <a:r>
-              <a:t>Attribut beschreibt, Methode tut etwas. Verbindung zu späteren eigenen Anweisungen in Robot Karol vorbereiten.</a:t>
-            </a:r>
-          </a:p>
-        </p:txBody>
-      </p:sp>
-      <p:sp>
-        <p:nvSpPr>
-          <p:cNvPr id="4" name="Slide Number Placeholder 3"/>
-          <p:cNvSpPr>
-            <a:spLocks noGrp="1"/>
-          </p:cNvSpPr>
-          <p:nvPr>
-            <p:ph type="sldNum" idx="5" sz="quarter"/>
-          </p:nvPr>
-        </p:nvSpPr>
-        <p:spPr/>
-      </p:sp>
-    </p:spTree>
-  </p:cSld>
-  <p:clrMapOvr>
-    <a:masterClrMapping/>
-  </p:clrMapOvr>
-</p:notes>
-</file>
-
-<file path=ppt/notesSlides/notesSlide9.xml><?xml version="1.0" encoding="utf-8"?>
-<p:notes xmlns:a="http://schemas.openxmlformats.org/drawingml/2006/main" xmlns:p="http://schemas.openxmlformats.org/presentationml/2006/main" xmlns:r="http://schemas.openxmlformats.org/officeDocument/2006/relationships">
-  <p:cSld>
-    <p:spTree>
-      <p:nvGrpSpPr>
-        <p:cNvPr id="1" name=""/>
-        <p:cNvGrpSpPr/>
-        <p:nvPr/>
-      </p:nvGrpSpPr>
-      <p:grpSpPr>
-        <a:xfrm>
-          <a:off x="0" y="0"/>
-          <a:ext cx="0" cy="0"/>
-          <a:chOff x="0" y="0"/>
-          <a:chExt cx="0" cy="0"/>
-        </a:xfrm>
-      </p:grpSpPr>
-      <p:sp>
-        <p:nvSpPr>
-          <p:cNvPr id="2" name="Slide Image Placeholder 1"/>
-          <p:cNvSpPr>
-            <a:spLocks noGrp="1"/>
-          </p:cNvSpPr>
-          <p:nvPr>
-            <p:ph type="sldImg" idx="2"/>
-          </p:nvPr>
-        </p:nvSpPr>
-        <p:spPr/>
-      </p:sp>
-      <p:sp>
-        <p:nvSpPr>
-          <p:cNvPr id="3" name="Notes Placeholder 2"/>
-          <p:cNvSpPr>
-            <a:spLocks noGrp="1"/>
-          </p:cNvSpPr>
-          <p:nvPr>
-            <p:ph type="body" idx="3" sz="quarter"/>
-          </p:nvPr>
-        </p:nvSpPr>
-        <p:spPr/>
-        <p:txBody>
-          <a:bodyPr/>
-          <a:lstStyle/>
-          <a:p>
-            <a:r>
-              <a:t>Früh die Fehlvorstellung adressieren: Definition bedeutet nicht automatische Ausführung. Das wird in Robot Karol später praktisch vertieft.</a:t>
+              <a:t>Quellenfolie. Quellenangaben sind für Lehrkraft/Weiterverwendung sichtbar.</a:t>
             </a:r>
           </a:p>
         </p:txBody>
@@ -4304,7 +3949,7 @@
             <a:avLst/>
           </a:prstGeom>
           <a:solidFill>
-            <a:srgbClr val="1F374E"/>
+            <a:srgbClr val="202C3C"/>
           </a:solidFill>
           <a:ln>
             <a:noFill/>
@@ -4340,8 +3985,8 @@
         </p:nvSpPr>
         <p:spPr>
           <a:xfrm>
-            <a:off x="731520" y="1417320"/>
-            <a:ext cx="10698480" cy="1188720"/>
+            <a:off x="731520" y="1554480"/>
+            <a:ext cx="10789920" cy="1097280"/>
           </a:xfrm>
           <a:prstGeom prst="rect">
             <a:avLst/>
@@ -4373,8 +4018,8 @@
         </p:nvSpPr>
         <p:spPr>
           <a:xfrm>
-            <a:off x="777240" y="2971800"/>
-            <a:ext cx="10515600" cy="731520"/>
+            <a:off x="777240" y="3017520"/>
+            <a:ext cx="10515600" cy="640080"/>
           </a:xfrm>
           <a:prstGeom prst="rect">
             <a:avLst/>
@@ -4393,1178 +4038,7 @@
                   <a:srgbClr val="FFFFFF"/>
                 </a:solidFill>
               </a:rPr>
-              <a:t>Klasse 8 · Objektorientierte Modellierung</a:t>
-            </a:r>
-          </a:p>
-        </p:txBody>
-      </p:sp>
-    </p:spTree>
-  </p:cSld>
-  <p:clrMapOvr>
-    <a:masterClrMapping/>
-  </p:clrMapOvr>
-</p:sld>
-</file>
-
-<file path=ppt/slides/slide10.xml><?xml version="1.0" encoding="utf-8"?>
-<p:sld xmlns:a="http://schemas.openxmlformats.org/drawingml/2006/main" xmlns:p="http://schemas.openxmlformats.org/presentationml/2006/main" xmlns:r="http://schemas.openxmlformats.org/officeDocument/2006/relationships">
-  <p:cSld>
-    <p:spTree>
-      <p:nvGrpSpPr>
-        <p:cNvPr id="1" name=""/>
-        <p:cNvGrpSpPr/>
-        <p:nvPr/>
-      </p:nvGrpSpPr>
-      <p:grpSpPr/>
-      <p:sp>
-        <p:nvSpPr>
-          <p:cNvPr id="2" name="Rectangle 1"/>
-          <p:cNvSpPr/>
-          <p:nvPr/>
-        </p:nvSpPr>
-        <p:spPr>
-          <a:xfrm>
-            <a:off x="0" y="0"/>
-            <a:ext cx="12191695" cy="100584"/>
-          </a:xfrm>
-          <a:prstGeom prst="rect">
-            <a:avLst/>
-          </a:prstGeom>
-          <a:solidFill>
-            <a:srgbClr val="4472C4"/>
-          </a:solidFill>
-          <a:ln>
-            <a:noFill/>
-          </a:ln>
-        </p:spPr>
-        <p:style>
-          <a:lnRef idx="1">
-            <a:schemeClr val="accent1"/>
-          </a:lnRef>
-          <a:fillRef idx="3">
-            <a:schemeClr val="accent1"/>
-          </a:fillRef>
-          <a:effectRef idx="2">
-            <a:schemeClr val="accent1"/>
-          </a:effectRef>
-          <a:fontRef idx="minor">
-            <a:schemeClr val="lt1"/>
-          </a:fontRef>
-        </p:style>
-        <p:txBody>
-          <a:bodyPr rtlCol="0" anchor="ctr"/>
-          <a:lstStyle/>
-          <a:p>
-            <a:pPr algn="ctr"/>
-          </a:p>
-        </p:txBody>
-      </p:sp>
-      <p:sp>
-        <p:nvSpPr>
-          <p:cNvPr id="3" name="TextBox 2"/>
-          <p:cNvSpPr txBox="1"/>
-          <p:nvPr/>
-        </p:nvSpPr>
-        <p:spPr>
-          <a:xfrm>
-            <a:off x="594360" y="320040"/>
-            <a:ext cx="10972800" cy="502920"/>
-          </a:xfrm>
-          <a:prstGeom prst="rect">
-            <a:avLst/>
-          </a:prstGeom>
-          <a:noFill/>
-        </p:spPr>
-        <p:txBody>
-          <a:bodyPr wrap="none">
-            <a:spAutoFit/>
-          </a:bodyPr>
-          <a:lstStyle/>
-          <a:p>
-            <a:r>
-              <a:rPr sz="2600" b="1">
-                <a:solidFill>
-                  <a:srgbClr val="1F374E"/>
-                </a:solidFill>
-              </a:rPr>
-              <a:t>Objektkarte erstellen</a:t>
-            </a:r>
-          </a:p>
-        </p:txBody>
-      </p:sp>
-      <p:sp>
-        <p:nvSpPr>
-          <p:cNvPr id="4" name="TextBox 3"/>
-          <p:cNvSpPr txBox="1"/>
-          <p:nvPr/>
-        </p:nvSpPr>
-        <p:spPr>
-          <a:xfrm>
-            <a:off x="685800" y="1234440"/>
-            <a:ext cx="5303520" cy="4937760"/>
-          </a:xfrm>
-          <a:prstGeom prst="rect">
-            <a:avLst/>
-          </a:prstGeom>
-          <a:noFill/>
-        </p:spPr>
-        <p:txBody>
-          <a:bodyPr wrap="square">
-            <a:spAutoFit/>
-          </a:bodyPr>
-          <a:lstStyle/>
-          <a:p>
-            <a:pPr>
-              <a:spcAft>
-                <a:spcPts val="800"/>
-              </a:spcAft>
-              <a:defRPr sz="1900">
-                <a:solidFill>
-                  <a:srgbClr val="232323"/>
-                </a:solidFill>
-              </a:defRPr>
-            </a:pPr>
-            <a:r>
-              <a:t>Wähle ein Alltagsobjekt.</a:t>
-            </a:r>
-          </a:p>
-          <a:p>
-            <a:pPr>
-              <a:spcAft>
-                <a:spcPts val="800"/>
-              </a:spcAft>
-              <a:defRPr sz="1900">
-                <a:solidFill>
-                  <a:srgbClr val="232323"/>
-                </a:solidFill>
-              </a:defRPr>
-            </a:pPr>
-            <a:r>
-              <a:t>Notiere Klasse, mindestens drei Attribute und Attributwerte.</a:t>
-            </a:r>
-          </a:p>
-          <a:p>
-            <a:pPr>
-              <a:spcAft>
-                <a:spcPts val="800"/>
-              </a:spcAft>
-              <a:defRPr sz="1900">
-                <a:solidFill>
-                  <a:srgbClr val="232323"/>
-                </a:solidFill>
-              </a:defRPr>
-            </a:pPr>
-            <a:r>
-              <a:t>Notiere zwei sinnvolle Methoden.</a:t>
-            </a:r>
-          </a:p>
-          <a:p>
-            <a:pPr>
-              <a:spcAft>
-                <a:spcPts val="800"/>
-              </a:spcAft>
-              <a:defRPr sz="1900">
-                <a:solidFill>
-                  <a:srgbClr val="232323"/>
-                </a:solidFill>
-              </a:defRPr>
-            </a:pPr>
-            <a:r>
-              <a:t>Erkläre: Was beschreibt Zustand, was Verhalten?</a:t>
-            </a:r>
-          </a:p>
-        </p:txBody>
-      </p:sp>
-      <p:sp>
-        <p:nvSpPr>
-          <p:cNvPr id="5" name="Rounded Rectangle 4"/>
-          <p:cNvSpPr/>
-          <p:nvPr/>
-        </p:nvSpPr>
-        <p:spPr>
-          <a:xfrm>
-            <a:off x="6400800" y="1371600"/>
-            <a:ext cx="1828800" cy="640080"/>
-          </a:xfrm>
-          <a:prstGeom prst="roundRect">
-            <a:avLst/>
-          </a:prstGeom>
-          <a:solidFill>
-            <a:srgbClr val="DCE6F1"/>
-          </a:solidFill>
-          <a:ln>
-            <a:solidFill>
-              <a:srgbClr val="4472C4"/>
-            </a:solidFill>
-          </a:ln>
-        </p:spPr>
-        <p:style>
-          <a:lnRef idx="1">
-            <a:schemeClr val="accent1"/>
-          </a:lnRef>
-          <a:fillRef idx="3">
-            <a:schemeClr val="accent1"/>
-          </a:fillRef>
-          <a:effectRef idx="2">
-            <a:schemeClr val="accent1"/>
-          </a:effectRef>
-          <a:fontRef idx="minor">
-            <a:schemeClr val="lt1"/>
-          </a:fontRef>
-        </p:style>
-        <p:txBody>
-          <a:bodyPr rtlCol="0" anchor="ctr" wrap="square"/>
-          <a:lstStyle/>
-          <a:p>
-            <a:pPr algn="ctr"/>
-            <a:r>
-              <a:rPr sz="1600" b="1">
-                <a:solidFill>
-                  <a:srgbClr val="1F374E"/>
-                </a:solidFill>
-              </a:rPr>
-              <a:t>Fahrrad A</a:t>
-            </a:r>
-          </a:p>
-        </p:txBody>
-      </p:sp>
-      <p:sp>
-        <p:nvSpPr>
-          <p:cNvPr id="6" name="Rounded Rectangle 5"/>
-          <p:cNvSpPr/>
-          <p:nvPr/>
-        </p:nvSpPr>
-        <p:spPr>
-          <a:xfrm>
-            <a:off x="8503920" y="1371600"/>
-            <a:ext cx="1828800" cy="640080"/>
-          </a:xfrm>
-          <a:prstGeom prst="roundRect">
-            <a:avLst/>
-          </a:prstGeom>
-          <a:solidFill>
-            <a:srgbClr val="DCE6F1"/>
-          </a:solidFill>
-          <a:ln>
-            <a:solidFill>
-              <a:srgbClr val="4472C4"/>
-            </a:solidFill>
-          </a:ln>
-        </p:spPr>
-        <p:style>
-          <a:lnRef idx="1">
-            <a:schemeClr val="accent1"/>
-          </a:lnRef>
-          <a:fillRef idx="3">
-            <a:schemeClr val="accent1"/>
-          </a:fillRef>
-          <a:effectRef idx="2">
-            <a:schemeClr val="accent1"/>
-          </a:effectRef>
-          <a:fontRef idx="minor">
-            <a:schemeClr val="lt1"/>
-          </a:fontRef>
-        </p:style>
-        <p:txBody>
-          <a:bodyPr rtlCol="0" anchor="ctr" wrap="square"/>
-          <a:lstStyle/>
-          <a:p>
-            <a:pPr algn="ctr"/>
-            <a:r>
-              <a:rPr sz="1600" b="1">
-                <a:solidFill>
-                  <a:srgbClr val="1F374E"/>
-                </a:solidFill>
-              </a:rPr>
-              <a:t>Fahrrad B</a:t>
-            </a:r>
-          </a:p>
-        </p:txBody>
-      </p:sp>
-      <p:sp>
-        <p:nvSpPr>
-          <p:cNvPr id="7" name="Rounded Rectangle 6"/>
-          <p:cNvSpPr/>
-          <p:nvPr/>
-        </p:nvSpPr>
-        <p:spPr>
-          <a:xfrm>
-            <a:off x="6400800" y="2377440"/>
-            <a:ext cx="1828800" cy="502920"/>
-          </a:xfrm>
-          <a:prstGeom prst="roundRect">
-            <a:avLst/>
-          </a:prstGeom>
-          <a:solidFill>
-            <a:srgbClr val="FFE699"/>
-          </a:solidFill>
-          <a:ln>
-            <a:solidFill>
-              <a:srgbClr val="4472C4"/>
-            </a:solidFill>
-          </a:ln>
-        </p:spPr>
-        <p:style>
-          <a:lnRef idx="1">
-            <a:schemeClr val="accent1"/>
-          </a:lnRef>
-          <a:fillRef idx="3">
-            <a:schemeClr val="accent1"/>
-          </a:fillRef>
-          <a:effectRef idx="2">
-            <a:schemeClr val="accent1"/>
-          </a:effectRef>
-          <a:fontRef idx="minor">
-            <a:schemeClr val="lt1"/>
-          </a:fontRef>
-        </p:style>
-        <p:txBody>
-          <a:bodyPr rtlCol="0" anchor="ctr" wrap="square"/>
-          <a:lstStyle/>
-          <a:p>
-            <a:pPr algn="ctr"/>
-            <a:r>
-              <a:rPr sz="1300" b="1">
-                <a:solidFill>
-                  <a:srgbClr val="1F374E"/>
-                </a:solidFill>
-              </a:rPr>
-              <a:t>farbe = rot</a:t>
-            </a:r>
-          </a:p>
-        </p:txBody>
-      </p:sp>
-      <p:sp>
-        <p:nvSpPr>
-          <p:cNvPr id="8" name="Rounded Rectangle 7"/>
-          <p:cNvSpPr/>
-          <p:nvPr/>
-        </p:nvSpPr>
-        <p:spPr>
-          <a:xfrm>
-            <a:off x="8503920" y="2377440"/>
-            <a:ext cx="1828800" cy="502920"/>
-          </a:xfrm>
-          <a:prstGeom prst="roundRect">
-            <a:avLst/>
-          </a:prstGeom>
-          <a:solidFill>
-            <a:srgbClr val="FFE699"/>
-          </a:solidFill>
-          <a:ln>
-            <a:solidFill>
-              <a:srgbClr val="4472C4"/>
-            </a:solidFill>
-          </a:ln>
-        </p:spPr>
-        <p:style>
-          <a:lnRef idx="1">
-            <a:schemeClr val="accent1"/>
-          </a:lnRef>
-          <a:fillRef idx="3">
-            <a:schemeClr val="accent1"/>
-          </a:fillRef>
-          <a:effectRef idx="2">
-            <a:schemeClr val="accent1"/>
-          </a:effectRef>
-          <a:fontRef idx="minor">
-            <a:schemeClr val="lt1"/>
-          </a:fontRef>
-        </p:style>
-        <p:txBody>
-          <a:bodyPr rtlCol="0" anchor="ctr" wrap="square"/>
-          <a:lstStyle/>
-          <a:p>
-            <a:pPr algn="ctr"/>
-            <a:r>
-              <a:rPr sz="1300" b="1">
-                <a:solidFill>
-                  <a:srgbClr val="1F374E"/>
-                </a:solidFill>
-              </a:rPr>
-              <a:t>farbe = blau</a:t>
-            </a:r>
-          </a:p>
-        </p:txBody>
-      </p:sp>
-      <p:sp>
-        <p:nvSpPr>
-          <p:cNvPr id="9" name="Rounded Rectangle 8"/>
-          <p:cNvSpPr/>
-          <p:nvPr/>
-        </p:nvSpPr>
-        <p:spPr>
-          <a:xfrm>
-            <a:off x="6400800" y="3063240"/>
-            <a:ext cx="1828800" cy="502920"/>
-          </a:xfrm>
-          <a:prstGeom prst="roundRect">
-            <a:avLst/>
-          </a:prstGeom>
-          <a:solidFill>
-            <a:srgbClr val="F2F6FA"/>
-          </a:solidFill>
-          <a:ln>
-            <a:solidFill>
-              <a:srgbClr val="4472C4"/>
-            </a:solidFill>
-          </a:ln>
-        </p:spPr>
-        <p:style>
-          <a:lnRef idx="1">
-            <a:schemeClr val="accent1"/>
-          </a:lnRef>
-          <a:fillRef idx="3">
-            <a:schemeClr val="accent1"/>
-          </a:fillRef>
-          <a:effectRef idx="2">
-            <a:schemeClr val="accent1"/>
-          </a:effectRef>
-          <a:fontRef idx="minor">
-            <a:schemeClr val="lt1"/>
-          </a:fontRef>
-        </p:style>
-        <p:txBody>
-          <a:bodyPr rtlCol="0" anchor="ctr" wrap="square"/>
-          <a:lstStyle/>
-          <a:p>
-            <a:pPr algn="ctr"/>
-            <a:r>
-              <a:rPr sz="1300" b="1">
-                <a:solidFill>
-                  <a:srgbClr val="1F374E"/>
-                </a:solidFill>
-              </a:rPr>
-              <a:t>gänge = 7</a:t>
-            </a:r>
-          </a:p>
-        </p:txBody>
-      </p:sp>
-      <p:sp>
-        <p:nvSpPr>
-          <p:cNvPr id="10" name="Rounded Rectangle 9"/>
-          <p:cNvSpPr/>
-          <p:nvPr/>
-        </p:nvSpPr>
-        <p:spPr>
-          <a:xfrm>
-            <a:off x="8503920" y="3063240"/>
-            <a:ext cx="1828800" cy="502920"/>
-          </a:xfrm>
-          <a:prstGeom prst="roundRect">
-            <a:avLst/>
-          </a:prstGeom>
-          <a:solidFill>
-            <a:srgbClr val="F2F6FA"/>
-          </a:solidFill>
-          <a:ln>
-            <a:solidFill>
-              <a:srgbClr val="4472C4"/>
-            </a:solidFill>
-          </a:ln>
-        </p:spPr>
-        <p:style>
-          <a:lnRef idx="1">
-            <a:schemeClr val="accent1"/>
-          </a:lnRef>
-          <a:fillRef idx="3">
-            <a:schemeClr val="accent1"/>
-          </a:fillRef>
-          <a:effectRef idx="2">
-            <a:schemeClr val="accent1"/>
-          </a:effectRef>
-          <a:fontRef idx="minor">
-            <a:schemeClr val="lt1"/>
-          </a:fontRef>
-        </p:style>
-        <p:txBody>
-          <a:bodyPr rtlCol="0" anchor="ctr" wrap="square"/>
-          <a:lstStyle/>
-          <a:p>
-            <a:pPr algn="ctr"/>
-            <a:r>
-              <a:rPr sz="1300" b="1">
-                <a:solidFill>
-                  <a:srgbClr val="1F374E"/>
-                </a:solidFill>
-              </a:rPr>
-              <a:t>gänge = 21</a:t>
-            </a:r>
-          </a:p>
-        </p:txBody>
-      </p:sp>
-      <p:sp>
-        <p:nvSpPr>
-          <p:cNvPr id="11" name="Rounded Rectangle 10"/>
-          <p:cNvSpPr/>
-          <p:nvPr/>
-        </p:nvSpPr>
-        <p:spPr>
-          <a:xfrm>
-            <a:off x="7452360" y="4160520"/>
-            <a:ext cx="2011680" cy="640080"/>
-          </a:xfrm>
-          <a:prstGeom prst="roundRect">
-            <a:avLst/>
-          </a:prstGeom>
-          <a:solidFill>
-            <a:srgbClr val="E2EFDA"/>
-          </a:solidFill>
-          <a:ln>
-            <a:solidFill>
-              <a:srgbClr val="4472C4"/>
-            </a:solidFill>
-          </a:ln>
-        </p:spPr>
-        <p:style>
-          <a:lnRef idx="1">
-            <a:schemeClr val="accent1"/>
-          </a:lnRef>
-          <a:fillRef idx="3">
-            <a:schemeClr val="accent1"/>
-          </a:fillRef>
-          <a:effectRef idx="2">
-            <a:schemeClr val="accent1"/>
-          </a:effectRef>
-          <a:fontRef idx="minor">
-            <a:schemeClr val="lt1"/>
-          </a:fontRef>
-        </p:style>
-        <p:txBody>
-          <a:bodyPr rtlCol="0" anchor="ctr" wrap="square"/>
-          <a:lstStyle/>
-          <a:p>
-            <a:pPr algn="ctr"/>
-            <a:r>
-              <a:rPr sz="1500" b="1">
-                <a:solidFill>
-                  <a:srgbClr val="1F374E"/>
-                </a:solidFill>
-              </a:rPr>
-              <a:t>Klasse Fahrrad</a:t>
-            </a:r>
-          </a:p>
-        </p:txBody>
-      </p:sp>
-      <p:sp>
-        <p:nvSpPr>
-          <p:cNvPr id="12" name="TextBox 11"/>
-          <p:cNvSpPr txBox="1"/>
-          <p:nvPr/>
-        </p:nvSpPr>
-        <p:spPr>
-          <a:xfrm>
-            <a:off x="502920" y="6510528"/>
-            <a:ext cx="11064240" cy="182880"/>
-          </a:xfrm>
-          <a:prstGeom prst="rect">
-            <a:avLst/>
-          </a:prstGeom>
-          <a:noFill/>
-        </p:spPr>
-        <p:txBody>
-          <a:bodyPr wrap="none">
-            <a:spAutoFit/>
-          </a:bodyPr>
-          <a:lstStyle/>
-          <a:p>
-            <a:pPr algn="r"/>
-            <a:r>
-              <a:rPr sz="800">
-                <a:solidFill>
-                  <a:srgbClr val="646464"/>
-                </a:solidFill>
-              </a:rPr>
-              <a:t>Grafik: eigene Darstellung</a:t>
-            </a:r>
-          </a:p>
-        </p:txBody>
-      </p:sp>
-    </p:spTree>
-  </p:cSld>
-  <p:clrMapOvr>
-    <a:masterClrMapping/>
-  </p:clrMapOvr>
-</p:sld>
-</file>
-
-<file path=ppt/slides/slide11.xml><?xml version="1.0" encoding="utf-8"?>
-<p:sld xmlns:a="http://schemas.openxmlformats.org/drawingml/2006/main" xmlns:p="http://schemas.openxmlformats.org/presentationml/2006/main" xmlns:r="http://schemas.openxmlformats.org/officeDocument/2006/relationships">
-  <p:cSld>
-    <p:spTree>
-      <p:nvGrpSpPr>
-        <p:cNvPr id="1" name=""/>
-        <p:cNvGrpSpPr/>
-        <p:nvPr/>
-      </p:nvGrpSpPr>
-      <p:grpSpPr/>
-      <p:sp>
-        <p:nvSpPr>
-          <p:cNvPr id="2" name="Rectangle 1"/>
-          <p:cNvSpPr/>
-          <p:nvPr/>
-        </p:nvSpPr>
-        <p:spPr>
-          <a:xfrm>
-            <a:off x="0" y="0"/>
-            <a:ext cx="12191695" cy="100584"/>
-          </a:xfrm>
-          <a:prstGeom prst="rect">
-            <a:avLst/>
-          </a:prstGeom>
-          <a:solidFill>
-            <a:srgbClr val="4472C4"/>
-          </a:solidFill>
-          <a:ln>
-            <a:noFill/>
-          </a:ln>
-        </p:spPr>
-        <p:style>
-          <a:lnRef idx="1">
-            <a:schemeClr val="accent1"/>
-          </a:lnRef>
-          <a:fillRef idx="3">
-            <a:schemeClr val="accent1"/>
-          </a:fillRef>
-          <a:effectRef idx="2">
-            <a:schemeClr val="accent1"/>
-          </a:effectRef>
-          <a:fontRef idx="minor">
-            <a:schemeClr val="lt1"/>
-          </a:fontRef>
-        </p:style>
-        <p:txBody>
-          <a:bodyPr rtlCol="0" anchor="ctr"/>
-          <a:lstStyle/>
-          <a:p>
-            <a:pPr algn="ctr"/>
-          </a:p>
-        </p:txBody>
-      </p:sp>
-      <p:sp>
-        <p:nvSpPr>
-          <p:cNvPr id="3" name="TextBox 2"/>
-          <p:cNvSpPr txBox="1"/>
-          <p:nvPr/>
-        </p:nvSpPr>
-        <p:spPr>
-          <a:xfrm>
-            <a:off x="594360" y="320040"/>
-            <a:ext cx="10972800" cy="502920"/>
-          </a:xfrm>
-          <a:prstGeom prst="rect">
-            <a:avLst/>
-          </a:prstGeom>
-          <a:noFill/>
-        </p:spPr>
-        <p:txBody>
-          <a:bodyPr wrap="none">
-            <a:spAutoFit/>
-          </a:bodyPr>
-          <a:lstStyle/>
-          <a:p>
-            <a:r>
-              <a:rPr sz="2600" b="1">
-                <a:solidFill>
-                  <a:srgbClr val="1F374E"/>
-                </a:solidFill>
-              </a:rPr>
-              <a:t>Brücke zu Algorithmen</a:t>
-            </a:r>
-          </a:p>
-        </p:txBody>
-      </p:sp>
-      <p:sp>
-        <p:nvSpPr>
-          <p:cNvPr id="4" name="TextBox 3"/>
-          <p:cNvSpPr txBox="1"/>
-          <p:nvPr/>
-        </p:nvSpPr>
-        <p:spPr>
-          <a:xfrm>
-            <a:off x="685800" y="1234440"/>
-            <a:ext cx="5303520" cy="4937760"/>
-          </a:xfrm>
-          <a:prstGeom prst="rect">
-            <a:avLst/>
-          </a:prstGeom>
-          <a:noFill/>
-        </p:spPr>
-        <p:txBody>
-          <a:bodyPr wrap="square">
-            <a:spAutoFit/>
-          </a:bodyPr>
-          <a:lstStyle/>
-          <a:p>
-            <a:pPr>
-              <a:spcAft>
-                <a:spcPts val="800"/>
-              </a:spcAft>
-              <a:defRPr sz="1900">
-                <a:solidFill>
-                  <a:srgbClr val="232323"/>
-                </a:solidFill>
-              </a:defRPr>
-            </a:pPr>
-            <a:r>
-              <a:t>Eine Methode braucht einen eindeutigen Ablauf.</a:t>
-            </a:r>
-          </a:p>
-          <a:p>
-            <a:pPr>
-              <a:spcAft>
-                <a:spcPts val="800"/>
-              </a:spcAft>
-              <a:defRPr sz="1900">
-                <a:solidFill>
-                  <a:srgbClr val="232323"/>
-                </a:solidFill>
-              </a:defRPr>
-            </a:pPr>
-            <a:r>
-              <a:t>Ein Ablauf besteht aus einzelnen Anweisungen.</a:t>
-            </a:r>
-          </a:p>
-          <a:p>
-            <a:pPr>
-              <a:spcAft>
-                <a:spcPts val="800"/>
-              </a:spcAft>
-              <a:defRPr sz="1900">
-                <a:solidFill>
-                  <a:srgbClr val="232323"/>
-                </a:solidFill>
-              </a:defRPr>
-            </a:pPr>
-            <a:r>
-              <a:t>Solche Abläufe untersuchen wir als Algorithmen.</a:t>
-            </a:r>
-          </a:p>
-        </p:txBody>
-      </p:sp>
-      <p:sp>
-        <p:nvSpPr>
-          <p:cNvPr id="5" name="Rounded Rectangle 4"/>
-          <p:cNvSpPr/>
-          <p:nvPr/>
-        </p:nvSpPr>
-        <p:spPr>
-          <a:xfrm>
-            <a:off x="6858000" y="1143000"/>
-            <a:ext cx="3291840" cy="594360"/>
-          </a:xfrm>
-          <a:prstGeom prst="roundRect">
-            <a:avLst/>
-          </a:prstGeom>
-          <a:solidFill>
-            <a:srgbClr val="F2F6FA"/>
-          </a:solidFill>
-          <a:ln>
-            <a:solidFill>
-              <a:srgbClr val="4472C4"/>
-            </a:solidFill>
-          </a:ln>
-        </p:spPr>
-        <p:style>
-          <a:lnRef idx="1">
-            <a:schemeClr val="accent1"/>
-          </a:lnRef>
-          <a:fillRef idx="3">
-            <a:schemeClr val="accent1"/>
-          </a:fillRef>
-          <a:effectRef idx="2">
-            <a:schemeClr val="accent1"/>
-          </a:effectRef>
-          <a:fontRef idx="minor">
-            <a:schemeClr val="lt1"/>
-          </a:fontRef>
-        </p:style>
-        <p:txBody>
-          <a:bodyPr rtlCol="0" anchor="ctr" wrap="square"/>
-          <a:lstStyle/>
-          <a:p>
-            <a:pPr algn="ctr"/>
-            <a:r>
-              <a:rPr sz="1500" b="1">
-                <a:solidFill>
-                  <a:srgbClr val="1F374E"/>
-                </a:solidFill>
-              </a:rPr>
-              <a:t>Start</a:t>
-            </a:r>
-          </a:p>
-        </p:txBody>
-      </p:sp>
-      <p:sp>
-        <p:nvSpPr>
-          <p:cNvPr id="6" name="Rounded Rectangle 5"/>
-          <p:cNvSpPr/>
-          <p:nvPr/>
-        </p:nvSpPr>
-        <p:spPr>
-          <a:xfrm>
-            <a:off x="6858000" y="2103120"/>
-            <a:ext cx="3291840" cy="594360"/>
-          </a:xfrm>
-          <a:prstGeom prst="roundRect">
-            <a:avLst/>
-          </a:prstGeom>
-          <a:solidFill>
-            <a:srgbClr val="DCE6F1"/>
-          </a:solidFill>
-          <a:ln>
-            <a:solidFill>
-              <a:srgbClr val="4472C4"/>
-            </a:solidFill>
-          </a:ln>
-        </p:spPr>
-        <p:style>
-          <a:lnRef idx="1">
-            <a:schemeClr val="accent1"/>
-          </a:lnRef>
-          <a:fillRef idx="3">
-            <a:schemeClr val="accent1"/>
-          </a:fillRef>
-          <a:effectRef idx="2">
-            <a:schemeClr val="accent1"/>
-          </a:effectRef>
-          <a:fontRef idx="minor">
-            <a:schemeClr val="lt1"/>
-          </a:fontRef>
-        </p:style>
-        <p:txBody>
-          <a:bodyPr rtlCol="0" anchor="ctr" wrap="square"/>
-          <a:lstStyle/>
-          <a:p>
-            <a:pPr algn="ctr"/>
-            <a:r>
-              <a:rPr sz="1500" b="1">
-                <a:solidFill>
-                  <a:srgbClr val="1F374E"/>
-                </a:solidFill>
-              </a:rPr>
-              <a:t>Anweisung 1</a:t>
-            </a:r>
-          </a:p>
-        </p:txBody>
-      </p:sp>
-      <p:sp>
-        <p:nvSpPr>
-          <p:cNvPr id="7" name="Rounded Rectangle 6"/>
-          <p:cNvSpPr/>
-          <p:nvPr/>
-        </p:nvSpPr>
-        <p:spPr>
-          <a:xfrm>
-            <a:off x="6858000" y="3063240"/>
-            <a:ext cx="3291840" cy="594360"/>
-          </a:xfrm>
-          <a:prstGeom prst="roundRect">
-            <a:avLst/>
-          </a:prstGeom>
-          <a:solidFill>
-            <a:srgbClr val="DCE6F1"/>
-          </a:solidFill>
-          <a:ln>
-            <a:solidFill>
-              <a:srgbClr val="4472C4"/>
-            </a:solidFill>
-          </a:ln>
-        </p:spPr>
-        <p:style>
-          <a:lnRef idx="1">
-            <a:schemeClr val="accent1"/>
-          </a:lnRef>
-          <a:fillRef idx="3">
-            <a:schemeClr val="accent1"/>
-          </a:fillRef>
-          <a:effectRef idx="2">
-            <a:schemeClr val="accent1"/>
-          </a:effectRef>
-          <a:fontRef idx="minor">
-            <a:schemeClr val="lt1"/>
-          </a:fontRef>
-        </p:style>
-        <p:txBody>
-          <a:bodyPr rtlCol="0" anchor="ctr" wrap="square"/>
-          <a:lstStyle/>
-          <a:p>
-            <a:pPr algn="ctr"/>
-            <a:r>
-              <a:rPr sz="1500" b="1">
-                <a:solidFill>
-                  <a:srgbClr val="1F374E"/>
-                </a:solidFill>
-              </a:rPr>
-              <a:t>Anweisung 2</a:t>
-            </a:r>
-          </a:p>
-        </p:txBody>
-      </p:sp>
-      <p:sp>
-        <p:nvSpPr>
-          <p:cNvPr id="8" name="Rounded Rectangle 7"/>
-          <p:cNvSpPr/>
-          <p:nvPr/>
-        </p:nvSpPr>
-        <p:spPr>
-          <a:xfrm>
-            <a:off x="6858000" y="4023360"/>
-            <a:ext cx="3291840" cy="594360"/>
-          </a:xfrm>
-          <a:prstGeom prst="roundRect">
-            <a:avLst/>
-          </a:prstGeom>
-          <a:solidFill>
-            <a:srgbClr val="F2F6FA"/>
-          </a:solidFill>
-          <a:ln>
-            <a:solidFill>
-              <a:srgbClr val="4472C4"/>
-            </a:solidFill>
-          </a:ln>
-        </p:spPr>
-        <p:style>
-          <a:lnRef idx="1">
-            <a:schemeClr val="accent1"/>
-          </a:lnRef>
-          <a:fillRef idx="3">
-            <a:schemeClr val="accent1"/>
-          </a:fillRef>
-          <a:effectRef idx="2">
-            <a:schemeClr val="accent1"/>
-          </a:effectRef>
-          <a:fontRef idx="minor">
-            <a:schemeClr val="lt1"/>
-          </a:fontRef>
-        </p:style>
-        <p:txBody>
-          <a:bodyPr rtlCol="0" anchor="ctr" wrap="square"/>
-          <a:lstStyle/>
-          <a:p>
-            <a:pPr algn="ctr"/>
-            <a:r>
-              <a:rPr sz="1500" b="1">
-                <a:solidFill>
-                  <a:srgbClr val="1F374E"/>
-                </a:solidFill>
-              </a:rPr>
-              <a:t>Ende</a:t>
-            </a:r>
-          </a:p>
-        </p:txBody>
-      </p:sp>
-      <p:sp>
-        <p:nvSpPr>
-          <p:cNvPr id="9" name="TextBox 8"/>
-          <p:cNvSpPr txBox="1"/>
-          <p:nvPr/>
-        </p:nvSpPr>
-        <p:spPr>
-          <a:xfrm>
-            <a:off x="502920" y="6510528"/>
-            <a:ext cx="11064240" cy="182880"/>
-          </a:xfrm>
-          <a:prstGeom prst="rect">
-            <a:avLst/>
-          </a:prstGeom>
-          <a:noFill/>
-        </p:spPr>
-        <p:txBody>
-          <a:bodyPr wrap="none">
-            <a:spAutoFit/>
-          </a:bodyPr>
-          <a:lstStyle/>
-          <a:p>
-            <a:pPr algn="r"/>
-            <a:r>
-              <a:rPr sz="800">
-                <a:solidFill>
-                  <a:srgbClr val="646464"/>
-                </a:solidFill>
-              </a:rPr>
-              <a:t>Grafik: eigene Darstellung</a:t>
-            </a:r>
-          </a:p>
-        </p:txBody>
-      </p:sp>
-    </p:spTree>
-  </p:cSld>
-  <p:clrMapOvr>
-    <a:masterClrMapping/>
-  </p:clrMapOvr>
-</p:sld>
-</file>
-
-<file path=ppt/slides/slide12.xml><?xml version="1.0" encoding="utf-8"?>
-<p:sld xmlns:a="http://schemas.openxmlformats.org/drawingml/2006/main" xmlns:p="http://schemas.openxmlformats.org/presentationml/2006/main" xmlns:r="http://schemas.openxmlformats.org/officeDocument/2006/relationships">
-  <p:cSld>
-    <p:spTree>
-      <p:nvGrpSpPr>
-        <p:cNvPr id="1" name=""/>
-        <p:cNvGrpSpPr/>
-        <p:nvPr/>
-      </p:nvGrpSpPr>
-      <p:grpSpPr/>
-      <p:sp>
-        <p:nvSpPr>
-          <p:cNvPr id="2" name="Rectangle 1"/>
-          <p:cNvSpPr/>
-          <p:nvPr/>
-        </p:nvSpPr>
-        <p:spPr>
-          <a:xfrm>
-            <a:off x="0" y="0"/>
-            <a:ext cx="12191695" cy="100584"/>
-          </a:xfrm>
-          <a:prstGeom prst="rect">
-            <a:avLst/>
-          </a:prstGeom>
-          <a:solidFill>
-            <a:srgbClr val="4472C4"/>
-          </a:solidFill>
-          <a:ln>
-            <a:noFill/>
-          </a:ln>
-        </p:spPr>
-        <p:style>
-          <a:lnRef idx="1">
-            <a:schemeClr val="accent1"/>
-          </a:lnRef>
-          <a:fillRef idx="3">
-            <a:schemeClr val="accent1"/>
-          </a:fillRef>
-          <a:effectRef idx="2">
-            <a:schemeClr val="accent1"/>
-          </a:effectRef>
-          <a:fontRef idx="minor">
-            <a:schemeClr val="lt1"/>
-          </a:fontRef>
-        </p:style>
-        <p:txBody>
-          <a:bodyPr rtlCol="0" anchor="ctr"/>
-          <a:lstStyle/>
-          <a:p>
-            <a:pPr algn="ctr"/>
-          </a:p>
-        </p:txBody>
-      </p:sp>
-      <p:sp>
-        <p:nvSpPr>
-          <p:cNvPr id="3" name="TextBox 2"/>
-          <p:cNvSpPr txBox="1"/>
-          <p:nvPr/>
-        </p:nvSpPr>
-        <p:spPr>
-          <a:xfrm>
-            <a:off x="594360" y="320040"/>
-            <a:ext cx="10972800" cy="502920"/>
-          </a:xfrm>
-          <a:prstGeom prst="rect">
-            <a:avLst/>
-          </a:prstGeom>
-          <a:noFill/>
-        </p:spPr>
-        <p:txBody>
-          <a:bodyPr wrap="none">
-            <a:spAutoFit/>
-          </a:bodyPr>
-          <a:lstStyle/>
-          <a:p>
-            <a:r>
-              <a:rPr sz="2600" b="1">
-                <a:solidFill>
-                  <a:srgbClr val="1F374E"/>
-                </a:solidFill>
-              </a:rPr>
-              <a:t>Quellen</a:t>
-            </a:r>
-          </a:p>
-        </p:txBody>
-      </p:sp>
-      <p:sp>
-        <p:nvSpPr>
-          <p:cNvPr id="4" name="TextBox 3"/>
-          <p:cNvSpPr txBox="1"/>
-          <p:nvPr/>
-        </p:nvSpPr>
-        <p:spPr>
-          <a:xfrm>
-            <a:off x="731520" y="1234440"/>
-            <a:ext cx="10698480" cy="5029200"/>
-          </a:xfrm>
-          <a:prstGeom prst="rect">
-            <a:avLst/>
-          </a:prstGeom>
-          <a:noFill/>
-        </p:spPr>
-        <p:txBody>
-          <a:bodyPr wrap="square">
-            <a:spAutoFit/>
-          </a:bodyPr>
-          <a:lstStyle/>
-          <a:p>
-            <a:pPr>
-              <a:spcAft>
-                <a:spcPts val="800"/>
-              </a:spcAft>
-              <a:defRPr sz="1500">
-                <a:solidFill>
-                  <a:srgbClr val="232323"/>
-                </a:solidFill>
-              </a:defRPr>
-            </a:pPr>
-            <a:r>
-              <a:t>Sächsischer Lehrplan Oberschule Informatik, Klassenstufe 8: https://www.schulportal.sachsen.de/lplandb/lehrplan/514</a:t>
-            </a:r>
-          </a:p>
-          <a:p>
-            <a:pPr>
-              <a:spcAft>
-                <a:spcPts val="800"/>
-              </a:spcAft>
-              <a:defRPr sz="1500">
-                <a:solidFill>
-                  <a:srgbClr val="232323"/>
-                </a:solidFill>
-              </a:defRPr>
-            </a:pPr>
-            <a:r>
-              <a:t>Grafiken und Beispiele: eigene didaktische Darstellung.</a:t>
-            </a:r>
-          </a:p>
-        </p:txBody>
-      </p:sp>
-      <p:sp>
-        <p:nvSpPr>
-          <p:cNvPr id="5" name="TextBox 4"/>
-          <p:cNvSpPr txBox="1"/>
-          <p:nvPr/>
-        </p:nvSpPr>
-        <p:spPr>
-          <a:xfrm>
-            <a:off x="502920" y="6510528"/>
-            <a:ext cx="11064240" cy="182880"/>
-          </a:xfrm>
-          <a:prstGeom prst="rect">
-            <a:avLst/>
-          </a:prstGeom>
-          <a:noFill/>
-        </p:spPr>
-        <p:txBody>
-          <a:bodyPr wrap="none">
-            <a:spAutoFit/>
-          </a:bodyPr>
-          <a:lstStyle/>
-          <a:p>
-            <a:pPr algn="r"/>
-            <a:r>
-              <a:rPr sz="800">
-                <a:solidFill>
-                  <a:srgbClr val="646464"/>
-                </a:solidFill>
-              </a:rPr>
-              <a:t>Quellenangaben · Grafiken: eigene Darstellung</a:t>
+              <a:t>Klasse 8 · voraussetzungsfreier Einstieg</a:t>
             </a:r>
           </a:p>
         </p:txBody>
@@ -5596,13 +4070,13 @@
         <p:spPr>
           <a:xfrm>
             <a:off x="0" y="0"/>
-            <a:ext cx="12191695" cy="100584"/>
+            <a:ext cx="12191695" cy="109728"/>
           </a:xfrm>
           <a:prstGeom prst="rect">
             <a:avLst/>
           </a:prstGeom>
           <a:solidFill>
-            <a:srgbClr val="4472C4"/>
+            <a:srgbClr val="305396"/>
           </a:solidFill>
           <a:ln>
             <a:noFill/>
@@ -5639,7 +4113,7 @@
         <p:spPr>
           <a:xfrm>
             <a:off x="594360" y="320040"/>
-            <a:ext cx="10972800" cy="502920"/>
+            <a:ext cx="10972800" cy="548640"/>
           </a:xfrm>
           <a:prstGeom prst="rect">
             <a:avLst/>
@@ -5655,7 +4129,7 @@
             <a:r>
               <a:rPr sz="2600" b="1">
                 <a:solidFill>
-                  <a:srgbClr val="1F374E"/>
+                  <a:srgbClr val="202C3C"/>
                 </a:solidFill>
               </a:rPr>
               <a:t>Leitfrage</a:t>
@@ -5671,18 +4145,18 @@
         </p:nvSpPr>
         <p:spPr>
           <a:xfrm>
-            <a:off x="822960" y="1325880"/>
-            <a:ext cx="10515600" cy="1417320"/>
+            <a:off x="777240" y="1234440"/>
+            <a:ext cx="10789920" cy="1234440"/>
           </a:xfrm>
           <a:prstGeom prst="roundRect">
             <a:avLst/>
           </a:prstGeom>
           <a:solidFill>
-            <a:srgbClr val="DCE6F1"/>
+            <a:srgbClr val="E5ECF6"/>
           </a:solidFill>
           <a:ln>
             <a:solidFill>
-              <a:srgbClr val="4472C4"/>
+              <a:srgbClr val="305396"/>
             </a:solidFill>
           </a:ln>
         </p:spPr>
@@ -5706,9 +4180,9 @@
           <a:p>
             <a:pPr algn="ctr"/>
             <a:r>
-              <a:rPr sz="2400" b="1">
+              <a:rPr sz="2200" b="1">
                 <a:solidFill>
-                  <a:srgbClr val="1F374E"/>
+                  <a:srgbClr val="202C3C"/>
                 </a:solidFill>
               </a:rPr>
               <a:t>Wie kann ein Computer ähnliche Dinge eindeutig beschreiben?</a:t>
@@ -5718,14 +4192,472 @@
       </p:sp>
       <p:sp>
         <p:nvSpPr>
-          <p:cNvPr id="5" name="TextBox 4"/>
+          <p:cNvPr id="5" name="Rectangle 4"/>
+          <p:cNvSpPr/>
+          <p:nvPr/>
+        </p:nvSpPr>
+        <p:spPr>
+          <a:xfrm>
+            <a:off x="7040880" y="2743200"/>
+            <a:ext cx="530352" cy="530352"/>
+          </a:xfrm>
+          <a:prstGeom prst="rect">
+            <a:avLst/>
+          </a:prstGeom>
+          <a:solidFill>
+            <a:srgbClr val="FFFFFF"/>
+          </a:solidFill>
+          <a:ln>
+            <a:solidFill>
+              <a:srgbClr val="6E6E6E"/>
+            </a:solidFill>
+          </a:ln>
+        </p:spPr>
+        <p:style>
+          <a:lnRef idx="1">
+            <a:schemeClr val="accent1"/>
+          </a:lnRef>
+          <a:fillRef idx="3">
+            <a:schemeClr val="accent1"/>
+          </a:fillRef>
+          <a:effectRef idx="2">
+            <a:schemeClr val="accent1"/>
+          </a:effectRef>
+          <a:fontRef idx="minor">
+            <a:schemeClr val="lt1"/>
+          </a:fontRef>
+        </p:style>
+        <p:txBody>
+          <a:bodyPr rtlCol="0" anchor="ctr"/>
+          <a:lstStyle/>
+          <a:p>
+            <a:pPr algn="ctr"/>
+          </a:p>
+        </p:txBody>
+      </p:sp>
+      <p:sp>
+        <p:nvSpPr>
+          <p:cNvPr id="6" name="Rectangle 5"/>
+          <p:cNvSpPr/>
+          <p:nvPr/>
+        </p:nvSpPr>
+        <p:spPr>
+          <a:xfrm>
+            <a:off x="7607808" y="2743200"/>
+            <a:ext cx="530352" cy="530352"/>
+          </a:xfrm>
+          <a:prstGeom prst="rect">
+            <a:avLst/>
+          </a:prstGeom>
+          <a:solidFill>
+            <a:srgbClr val="FFFFFF"/>
+          </a:solidFill>
+          <a:ln>
+            <a:solidFill>
+              <a:srgbClr val="6E6E6E"/>
+            </a:solidFill>
+          </a:ln>
+        </p:spPr>
+        <p:style>
+          <a:lnRef idx="1">
+            <a:schemeClr val="accent1"/>
+          </a:lnRef>
+          <a:fillRef idx="3">
+            <a:schemeClr val="accent1"/>
+          </a:fillRef>
+          <a:effectRef idx="2">
+            <a:schemeClr val="accent1"/>
+          </a:effectRef>
+          <a:fontRef idx="minor">
+            <a:schemeClr val="lt1"/>
+          </a:fontRef>
+        </p:style>
+        <p:txBody>
+          <a:bodyPr rtlCol="0" anchor="ctr"/>
+          <a:lstStyle/>
+          <a:p>
+            <a:pPr algn="ctr"/>
+          </a:p>
+        </p:txBody>
+      </p:sp>
+      <p:sp>
+        <p:nvSpPr>
+          <p:cNvPr id="7" name="Rectangle 6"/>
+          <p:cNvSpPr/>
+          <p:nvPr/>
+        </p:nvSpPr>
+        <p:spPr>
+          <a:xfrm>
+            <a:off x="8174736" y="2743200"/>
+            <a:ext cx="530352" cy="530352"/>
+          </a:xfrm>
+          <a:prstGeom prst="rect">
+            <a:avLst/>
+          </a:prstGeom>
+          <a:solidFill>
+            <a:srgbClr val="FFFFFF"/>
+          </a:solidFill>
+          <a:ln>
+            <a:solidFill>
+              <a:srgbClr val="6E6E6E"/>
+            </a:solidFill>
+          </a:ln>
+        </p:spPr>
+        <p:style>
+          <a:lnRef idx="1">
+            <a:schemeClr val="accent1"/>
+          </a:lnRef>
+          <a:fillRef idx="3">
+            <a:schemeClr val="accent1"/>
+          </a:fillRef>
+          <a:effectRef idx="2">
+            <a:schemeClr val="accent1"/>
+          </a:effectRef>
+          <a:fontRef idx="minor">
+            <a:schemeClr val="lt1"/>
+          </a:fontRef>
+        </p:style>
+        <p:txBody>
+          <a:bodyPr rtlCol="0" anchor="ctr"/>
+          <a:lstStyle/>
+          <a:p>
+            <a:pPr algn="ctr"/>
+          </a:p>
+        </p:txBody>
+      </p:sp>
+      <p:sp>
+        <p:nvSpPr>
+          <p:cNvPr id="8" name="Rectangle 7"/>
+          <p:cNvSpPr/>
+          <p:nvPr/>
+        </p:nvSpPr>
+        <p:spPr>
+          <a:xfrm>
+            <a:off x="7040880" y="3310128"/>
+            <a:ext cx="530352" cy="530352"/>
+          </a:xfrm>
+          <a:prstGeom prst="rect">
+            <a:avLst/>
+          </a:prstGeom>
+          <a:solidFill>
+            <a:srgbClr val="FFFFFF"/>
+          </a:solidFill>
+          <a:ln>
+            <a:solidFill>
+              <a:srgbClr val="6E6E6E"/>
+            </a:solidFill>
+          </a:ln>
+        </p:spPr>
+        <p:style>
+          <a:lnRef idx="1">
+            <a:schemeClr val="accent1"/>
+          </a:lnRef>
+          <a:fillRef idx="3">
+            <a:schemeClr val="accent1"/>
+          </a:fillRef>
+          <a:effectRef idx="2">
+            <a:schemeClr val="accent1"/>
+          </a:effectRef>
+          <a:fontRef idx="minor">
+            <a:schemeClr val="lt1"/>
+          </a:fontRef>
+        </p:style>
+        <p:txBody>
+          <a:bodyPr rtlCol="0" anchor="ctr"/>
+          <a:lstStyle/>
+          <a:p>
+            <a:pPr algn="ctr"/>
+          </a:p>
+        </p:txBody>
+      </p:sp>
+      <p:sp>
+        <p:nvSpPr>
+          <p:cNvPr id="9" name="Rectangle 8"/>
+          <p:cNvSpPr/>
+          <p:nvPr/>
+        </p:nvSpPr>
+        <p:spPr>
+          <a:xfrm>
+            <a:off x="7607808" y="3310128"/>
+            <a:ext cx="530352" cy="530352"/>
+          </a:xfrm>
+          <a:prstGeom prst="rect">
+            <a:avLst/>
+          </a:prstGeom>
+          <a:solidFill>
+            <a:srgbClr val="FFFFFF"/>
+          </a:solidFill>
+          <a:ln>
+            <a:solidFill>
+              <a:srgbClr val="6E6E6E"/>
+            </a:solidFill>
+          </a:ln>
+        </p:spPr>
+        <p:style>
+          <a:lnRef idx="1">
+            <a:schemeClr val="accent1"/>
+          </a:lnRef>
+          <a:fillRef idx="3">
+            <a:schemeClr val="accent1"/>
+          </a:fillRef>
+          <a:effectRef idx="2">
+            <a:schemeClr val="accent1"/>
+          </a:effectRef>
+          <a:fontRef idx="minor">
+            <a:schemeClr val="lt1"/>
+          </a:fontRef>
+        </p:style>
+        <p:txBody>
+          <a:bodyPr rtlCol="0" anchor="ctr"/>
+          <a:lstStyle/>
+          <a:p>
+            <a:pPr algn="ctr"/>
+          </a:p>
+        </p:txBody>
+      </p:sp>
+      <p:sp>
+        <p:nvSpPr>
+          <p:cNvPr id="10" name="Rectangle 9"/>
+          <p:cNvSpPr/>
+          <p:nvPr/>
+        </p:nvSpPr>
+        <p:spPr>
+          <a:xfrm>
+            <a:off x="8174736" y="3310128"/>
+            <a:ext cx="530352" cy="530352"/>
+          </a:xfrm>
+          <a:prstGeom prst="rect">
+            <a:avLst/>
+          </a:prstGeom>
+          <a:solidFill>
+            <a:srgbClr val="FFFFFF"/>
+          </a:solidFill>
+          <a:ln>
+            <a:solidFill>
+              <a:srgbClr val="6E6E6E"/>
+            </a:solidFill>
+          </a:ln>
+        </p:spPr>
+        <p:style>
+          <a:lnRef idx="1">
+            <a:schemeClr val="accent1"/>
+          </a:lnRef>
+          <a:fillRef idx="3">
+            <a:schemeClr val="accent1"/>
+          </a:fillRef>
+          <a:effectRef idx="2">
+            <a:schemeClr val="accent1"/>
+          </a:effectRef>
+          <a:fontRef idx="minor">
+            <a:schemeClr val="lt1"/>
+          </a:fontRef>
+        </p:style>
+        <p:txBody>
+          <a:bodyPr rtlCol="0" anchor="ctr"/>
+          <a:lstStyle/>
+          <a:p>
+            <a:pPr algn="ctr"/>
+          </a:p>
+        </p:txBody>
+      </p:sp>
+      <p:sp>
+        <p:nvSpPr>
+          <p:cNvPr id="11" name="Rectangle 10"/>
+          <p:cNvSpPr/>
+          <p:nvPr/>
+        </p:nvSpPr>
+        <p:spPr>
+          <a:xfrm>
+            <a:off x="7040880" y="3877056"/>
+            <a:ext cx="530352" cy="530352"/>
+          </a:xfrm>
+          <a:prstGeom prst="rect">
+            <a:avLst/>
+          </a:prstGeom>
+          <a:solidFill>
+            <a:srgbClr val="FFFFFF"/>
+          </a:solidFill>
+          <a:ln>
+            <a:solidFill>
+              <a:srgbClr val="6E6E6E"/>
+            </a:solidFill>
+          </a:ln>
+        </p:spPr>
+        <p:style>
+          <a:lnRef idx="1">
+            <a:schemeClr val="accent1"/>
+          </a:lnRef>
+          <a:fillRef idx="3">
+            <a:schemeClr val="accent1"/>
+          </a:fillRef>
+          <a:effectRef idx="2">
+            <a:schemeClr val="accent1"/>
+          </a:effectRef>
+          <a:fontRef idx="minor">
+            <a:schemeClr val="lt1"/>
+          </a:fontRef>
+        </p:style>
+        <p:txBody>
+          <a:bodyPr rtlCol="0" anchor="ctr"/>
+          <a:lstStyle/>
+          <a:p>
+            <a:pPr algn="ctr"/>
+          </a:p>
+        </p:txBody>
+      </p:sp>
+      <p:sp>
+        <p:nvSpPr>
+          <p:cNvPr id="12" name="Rectangle 11"/>
+          <p:cNvSpPr/>
+          <p:nvPr/>
+        </p:nvSpPr>
+        <p:spPr>
+          <a:xfrm>
+            <a:off x="7607808" y="3877056"/>
+            <a:ext cx="530352" cy="530352"/>
+          </a:xfrm>
+          <a:prstGeom prst="rect">
+            <a:avLst/>
+          </a:prstGeom>
+          <a:solidFill>
+            <a:srgbClr val="FFFFFF"/>
+          </a:solidFill>
+          <a:ln>
+            <a:solidFill>
+              <a:srgbClr val="6E6E6E"/>
+            </a:solidFill>
+          </a:ln>
+        </p:spPr>
+        <p:style>
+          <a:lnRef idx="1">
+            <a:schemeClr val="accent1"/>
+          </a:lnRef>
+          <a:fillRef idx="3">
+            <a:schemeClr val="accent1"/>
+          </a:fillRef>
+          <a:effectRef idx="2">
+            <a:schemeClr val="accent1"/>
+          </a:effectRef>
+          <a:fontRef idx="minor">
+            <a:schemeClr val="lt1"/>
+          </a:fontRef>
+        </p:style>
+        <p:txBody>
+          <a:bodyPr rtlCol="0" anchor="ctr"/>
+          <a:lstStyle/>
+          <a:p>
+            <a:pPr algn="ctr"/>
+          </a:p>
+        </p:txBody>
+      </p:sp>
+      <p:sp>
+        <p:nvSpPr>
+          <p:cNvPr id="13" name="Rectangle 12"/>
+          <p:cNvSpPr/>
+          <p:nvPr/>
+        </p:nvSpPr>
+        <p:spPr>
+          <a:xfrm>
+            <a:off x="8174736" y="3877056"/>
+            <a:ext cx="530352" cy="530352"/>
+          </a:xfrm>
+          <a:prstGeom prst="rect">
+            <a:avLst/>
+          </a:prstGeom>
+          <a:solidFill>
+            <a:srgbClr val="FFFFFF"/>
+          </a:solidFill>
+          <a:ln>
+            <a:solidFill>
+              <a:srgbClr val="6E6E6E"/>
+            </a:solidFill>
+          </a:ln>
+        </p:spPr>
+        <p:style>
+          <a:lnRef idx="1">
+            <a:schemeClr val="accent1"/>
+          </a:lnRef>
+          <a:fillRef idx="3">
+            <a:schemeClr val="accent1"/>
+          </a:fillRef>
+          <a:effectRef idx="2">
+            <a:schemeClr val="accent1"/>
+          </a:effectRef>
+          <a:fontRef idx="minor">
+            <a:schemeClr val="lt1"/>
+          </a:fontRef>
+        </p:style>
+        <p:txBody>
+          <a:bodyPr rtlCol="0" anchor="ctr"/>
+          <a:lstStyle/>
+          <a:p>
+            <a:pPr algn="ctr"/>
+          </a:p>
+        </p:txBody>
+      </p:sp>
+      <p:sp>
+        <p:nvSpPr>
+          <p:cNvPr id="14" name="Rounded Rectangle 13"/>
+          <p:cNvSpPr/>
+          <p:nvPr/>
+        </p:nvSpPr>
+        <p:spPr>
+          <a:xfrm>
+            <a:off x="6126480" y="3246120"/>
+            <a:ext cx="658368" cy="658368"/>
+          </a:xfrm>
+          <a:prstGeom prst="roundRect">
+            <a:avLst/>
+          </a:prstGeom>
+          <a:solidFill>
+            <a:srgbClr val="FFE899"/>
+          </a:solidFill>
+          <a:ln>
+            <a:solidFill>
+              <a:srgbClr val="305396"/>
+            </a:solidFill>
+          </a:ln>
+        </p:spPr>
+        <p:style>
+          <a:lnRef idx="1">
+            <a:schemeClr val="accent1"/>
+          </a:lnRef>
+          <a:fillRef idx="3">
+            <a:schemeClr val="accent1"/>
+          </a:fillRef>
+          <a:effectRef idx="2">
+            <a:schemeClr val="accent1"/>
+          </a:effectRef>
+          <a:fontRef idx="minor">
+            <a:schemeClr val="lt1"/>
+          </a:fontRef>
+        </p:style>
+        <p:txBody>
+          <a:bodyPr rtlCol="0" anchor="ctr" wrap="square"/>
+          <a:lstStyle/>
+          <a:p>
+            <a:pPr algn="ctr"/>
+            <a:r>
+              <a:rPr sz="1700" b="1">
+                <a:solidFill>
+                  <a:srgbClr val="202C3C"/>
+                </a:solidFill>
+              </a:rPr>
+              <a:t>K</a:t>
+            </a:r>
+          </a:p>
+        </p:txBody>
+      </p:sp>
+      <p:sp>
+        <p:nvSpPr>
+          <p:cNvPr id="15" name="TextBox 14"/>
           <p:cNvSpPr txBox="1"/>
           <p:nvPr/>
         </p:nvSpPr>
         <p:spPr>
           <a:xfrm>
-            <a:off x="502920" y="6510528"/>
-            <a:ext cx="11064240" cy="182880"/>
+            <a:off x="365760" y="6510528"/>
+            <a:ext cx="11430000" cy="228600"/>
           </a:xfrm>
           <a:prstGeom prst="rect">
             <a:avLst/>
@@ -5742,7 +4674,7 @@
             <a:r>
               <a:rPr sz="800">
                 <a:solidFill>
-                  <a:srgbClr val="646464"/>
+                  <a:srgbClr val="6E6E6E"/>
                 </a:solidFill>
               </a:rPr>
               <a:t>Grafik: eigene Darstellung</a:t>
@@ -5777,13 +4709,13 @@
         <p:spPr>
           <a:xfrm>
             <a:off x="0" y="0"/>
-            <a:ext cx="12191695" cy="100584"/>
+            <a:ext cx="12191695" cy="109728"/>
           </a:xfrm>
           <a:prstGeom prst="rect">
             <a:avLst/>
           </a:prstGeom>
           <a:solidFill>
-            <a:srgbClr val="4472C4"/>
+            <a:srgbClr val="305396"/>
           </a:solidFill>
           <a:ln>
             <a:noFill/>
@@ -5820,7 +4752,7 @@
         <p:spPr>
           <a:xfrm>
             <a:off x="594360" y="320040"/>
-            <a:ext cx="10972800" cy="502920"/>
+            <a:ext cx="10972800" cy="548640"/>
           </a:xfrm>
           <a:prstGeom prst="rect">
             <a:avLst/>
@@ -5836,10 +4768,10 @@
             <a:r>
               <a:rPr sz="2600" b="1">
                 <a:solidFill>
-                  <a:srgbClr val="1F374E"/>
+                  <a:srgbClr val="202C3C"/>
                 </a:solidFill>
               </a:rPr>
-              <a:t>Ein konkretes Ding: das Objekt</a:t>
+              <a:t>Objekt, Attribut, Attributwert</a:t>
             </a:r>
           </a:p>
         </p:txBody>
@@ -5853,7 +4785,7 @@
         <p:spPr>
           <a:xfrm>
             <a:off x="685800" y="1234440"/>
-            <a:ext cx="5303520" cy="4937760"/>
+            <a:ext cx="5394960" cy="5029200"/>
           </a:xfrm>
           <a:prstGeom prst="rect">
             <a:avLst/>
@@ -5868,46 +4800,61 @@
           <a:p>
             <a:pPr>
               <a:spcAft>
-                <a:spcPts val="800"/>
+                <a:spcPts val="700"/>
               </a:spcAft>
               <a:defRPr sz="1900">
                 <a:solidFill>
-                  <a:srgbClr val="232323"/>
+                  <a:srgbClr val="1E1E1E"/>
                 </a:solidFill>
               </a:defRPr>
             </a:pPr>
             <a:r>
-              <a:t>Ein Objekt ist etwas Konkretes, das wir einzeln betrachten.</a:t>
+              <a:t>Objekt: ein konkretes einzelnes Ding</a:t>
             </a:r>
           </a:p>
           <a:p>
             <a:pPr>
               <a:spcAft>
-                <a:spcPts val="800"/>
+                <a:spcPts val="700"/>
               </a:spcAft>
               <a:defRPr sz="1900">
                 <a:solidFill>
-                  <a:srgbClr val="232323"/>
+                  <a:srgbClr val="1E1E1E"/>
                 </a:solidFill>
               </a:defRPr>
             </a:pPr>
             <a:r>
-              <a:t>Beispiele: dieses Fahrrad, diese Lampe, dieses Smartphone.</a:t>
+              <a:t>Attribut: benannte Eigenschaft</a:t>
             </a:r>
           </a:p>
           <a:p>
             <a:pPr>
               <a:spcAft>
-                <a:spcPts val="800"/>
+                <a:spcPts val="700"/>
               </a:spcAft>
               <a:defRPr sz="1900">
                 <a:solidFill>
-                  <a:srgbClr val="232323"/>
+                  <a:srgbClr val="1E1E1E"/>
                 </a:solidFill>
               </a:defRPr>
             </a:pPr>
             <a:r>
-              <a:t>Objekte können Eigenschaften besitzen und Aktionen ausführen.</a:t>
+              <a:t>Attributwert: aktueller Wert</a:t>
+            </a:r>
+          </a:p>
+          <a:p>
+            <a:pPr>
+              <a:spcAft>
+                <a:spcPts val="700"/>
+              </a:spcAft>
+              <a:defRPr sz="1900">
+                <a:solidFill>
+                  <a:srgbClr val="1E1E1E"/>
+                </a:solidFill>
+              </a:defRPr>
+            </a:pPr>
+            <a:r>
+              <a:t>Beispiel: fahrrad1.farbe = rot</a:t>
             </a:r>
           </a:p>
         </p:txBody>
@@ -5921,17 +4868,17 @@
         <p:spPr>
           <a:xfrm>
             <a:off x="6400800" y="1371600"/>
-            <a:ext cx="1828800" cy="640080"/>
+            <a:ext cx="2011680" cy="731520"/>
           </a:xfrm>
           <a:prstGeom prst="roundRect">
             <a:avLst/>
           </a:prstGeom>
           <a:solidFill>
-            <a:srgbClr val="DCE6F1"/>
+            <a:srgbClr val="E5ECF6"/>
           </a:solidFill>
           <a:ln>
             <a:solidFill>
-              <a:srgbClr val="4472C4"/>
+              <a:srgbClr val="305396"/>
             </a:solidFill>
           </a:ln>
         </p:spPr>
@@ -5957,7 +4904,7 @@
             <a:r>
               <a:rPr sz="1600" b="1">
                 <a:solidFill>
-                  <a:srgbClr val="1F374E"/>
+                  <a:srgbClr val="202C3C"/>
                 </a:solidFill>
               </a:rPr>
               <a:t>Fahrrad A</a:t>
@@ -5973,18 +4920,18 @@
         </p:nvSpPr>
         <p:spPr>
           <a:xfrm>
-            <a:off x="8503920" y="1371600"/>
-            <a:ext cx="1828800" cy="640080"/>
+            <a:off x="8778240" y="1371600"/>
+            <a:ext cx="2011680" cy="731520"/>
           </a:xfrm>
           <a:prstGeom prst="roundRect">
             <a:avLst/>
           </a:prstGeom>
           <a:solidFill>
-            <a:srgbClr val="DCE6F1"/>
+            <a:srgbClr val="E5ECF6"/>
           </a:solidFill>
           <a:ln>
             <a:solidFill>
-              <a:srgbClr val="4472C4"/>
+              <a:srgbClr val="305396"/>
             </a:solidFill>
           </a:ln>
         </p:spPr>
@@ -6010,7 +4957,7 @@
             <a:r>
               <a:rPr sz="1600" b="1">
                 <a:solidFill>
-                  <a:srgbClr val="1F374E"/>
+                  <a:srgbClr val="202C3C"/>
                 </a:solidFill>
               </a:rPr>
               <a:t>Fahrrad B</a:t>
@@ -6026,18 +4973,18 @@
         </p:nvSpPr>
         <p:spPr>
           <a:xfrm>
-            <a:off x="6400800" y="2377440"/>
-            <a:ext cx="1828800" cy="502920"/>
+            <a:off x="6400800" y="2468880"/>
+            <a:ext cx="2011680" cy="548640"/>
           </a:xfrm>
           <a:prstGeom prst="roundRect">
             <a:avLst/>
           </a:prstGeom>
           <a:solidFill>
-            <a:srgbClr val="FFE699"/>
+            <a:srgbClr val="FFE899"/>
           </a:solidFill>
           <a:ln>
             <a:solidFill>
-              <a:srgbClr val="4472C4"/>
+              <a:srgbClr val="305396"/>
             </a:solidFill>
           </a:ln>
         </p:spPr>
@@ -6063,7 +5010,7 @@
             <a:r>
               <a:rPr sz="1300" b="1">
                 <a:solidFill>
-                  <a:srgbClr val="1F374E"/>
+                  <a:srgbClr val="202C3C"/>
                 </a:solidFill>
               </a:rPr>
               <a:t>farbe = rot</a:t>
@@ -6079,18 +5026,18 @@
         </p:nvSpPr>
         <p:spPr>
           <a:xfrm>
-            <a:off x="8503920" y="2377440"/>
-            <a:ext cx="1828800" cy="502920"/>
+            <a:off x="8778240" y="2468880"/>
+            <a:ext cx="2011680" cy="548640"/>
           </a:xfrm>
           <a:prstGeom prst="roundRect">
             <a:avLst/>
           </a:prstGeom>
           <a:solidFill>
-            <a:srgbClr val="FFE699"/>
+            <a:srgbClr val="FFE899"/>
           </a:solidFill>
           <a:ln>
             <a:solidFill>
-              <a:srgbClr val="4472C4"/>
+              <a:srgbClr val="305396"/>
             </a:solidFill>
           </a:ln>
         </p:spPr>
@@ -6116,7 +5063,7 @@
             <a:r>
               <a:rPr sz="1300" b="1">
                 <a:solidFill>
-                  <a:srgbClr val="1F374E"/>
+                  <a:srgbClr val="202C3C"/>
                 </a:solidFill>
               </a:rPr>
               <a:t>farbe = blau</a:t>
@@ -6132,18 +5079,18 @@
         </p:nvSpPr>
         <p:spPr>
           <a:xfrm>
-            <a:off x="6400800" y="3063240"/>
-            <a:ext cx="1828800" cy="502920"/>
+            <a:off x="7589520" y="3749039"/>
+            <a:ext cx="2011680" cy="731520"/>
           </a:xfrm>
           <a:prstGeom prst="roundRect">
             <a:avLst/>
           </a:prstGeom>
           <a:solidFill>
-            <a:srgbClr val="F2F6FA"/>
+            <a:srgbClr val="DDEEDD"/>
           </a:solidFill>
           <a:ln>
             <a:solidFill>
-              <a:srgbClr val="4472C4"/>
+              <a:srgbClr val="305396"/>
             </a:solidFill>
           </a:ln>
         </p:spPr>
@@ -6167,132 +5114,27 @@
           <a:p>
             <a:pPr algn="ctr"/>
             <a:r>
-              <a:rPr sz="1300" b="1">
+              <a:rPr sz="1400" b="1">
                 <a:solidFill>
-                  <a:srgbClr val="1F374E"/>
+                  <a:srgbClr val="202C3C"/>
                 </a:solidFill>
               </a:rPr>
-              <a:t>gänge = 7</a:t>
-            </a:r>
-          </a:p>
-        </p:txBody>
-      </p:sp>
-      <p:sp>
-        <p:nvSpPr>
-          <p:cNvPr id="10" name="Rounded Rectangle 9"/>
-          <p:cNvSpPr/>
-          <p:nvPr/>
-        </p:nvSpPr>
-        <p:spPr>
-          <a:xfrm>
-            <a:off x="8503920" y="3063240"/>
-            <a:ext cx="1828800" cy="502920"/>
-          </a:xfrm>
-          <a:prstGeom prst="roundRect">
-            <a:avLst/>
-          </a:prstGeom>
-          <a:solidFill>
-            <a:srgbClr val="F2F6FA"/>
-          </a:solidFill>
-          <a:ln>
-            <a:solidFill>
-              <a:srgbClr val="4472C4"/>
-            </a:solidFill>
-          </a:ln>
-        </p:spPr>
-        <p:style>
-          <a:lnRef idx="1">
-            <a:schemeClr val="accent1"/>
-          </a:lnRef>
-          <a:fillRef idx="3">
-            <a:schemeClr val="accent1"/>
-          </a:fillRef>
-          <a:effectRef idx="2">
-            <a:schemeClr val="accent1"/>
-          </a:effectRef>
-          <a:fontRef idx="minor">
-            <a:schemeClr val="lt1"/>
-          </a:fontRef>
-        </p:style>
-        <p:txBody>
-          <a:bodyPr rtlCol="0" anchor="ctr" wrap="square"/>
-          <a:lstStyle/>
-          <a:p>
-            <a:pPr algn="ctr"/>
-            <a:r>
-              <a:rPr sz="1300" b="1">
-                <a:solidFill>
-                  <a:srgbClr val="1F374E"/>
-                </a:solidFill>
-              </a:rPr>
-              <a:t>gänge = 21</a:t>
-            </a:r>
-          </a:p>
-        </p:txBody>
-      </p:sp>
-      <p:sp>
-        <p:nvSpPr>
-          <p:cNvPr id="11" name="Rounded Rectangle 10"/>
-          <p:cNvSpPr/>
-          <p:nvPr/>
-        </p:nvSpPr>
-        <p:spPr>
-          <a:xfrm>
-            <a:off x="7452360" y="4160520"/>
-            <a:ext cx="2011680" cy="640080"/>
-          </a:xfrm>
-          <a:prstGeom prst="roundRect">
-            <a:avLst/>
-          </a:prstGeom>
-          <a:solidFill>
-            <a:srgbClr val="E2EFDA"/>
-          </a:solidFill>
-          <a:ln>
-            <a:solidFill>
-              <a:srgbClr val="4472C4"/>
-            </a:solidFill>
-          </a:ln>
-        </p:spPr>
-        <p:style>
-          <a:lnRef idx="1">
-            <a:schemeClr val="accent1"/>
-          </a:lnRef>
-          <a:fillRef idx="3">
-            <a:schemeClr val="accent1"/>
-          </a:fillRef>
-          <a:effectRef idx="2">
-            <a:schemeClr val="accent1"/>
-          </a:effectRef>
-          <a:fontRef idx="minor">
-            <a:schemeClr val="lt1"/>
-          </a:fontRef>
-        </p:style>
-        <p:txBody>
-          <a:bodyPr rtlCol="0" anchor="ctr" wrap="square"/>
-          <a:lstStyle/>
-          <a:p>
-            <a:pPr algn="ctr"/>
-            <a:r>
-              <a:rPr sz="1500" b="1">
-                <a:solidFill>
-                  <a:srgbClr val="1F374E"/>
-                </a:solidFill>
-              </a:rPr>
-              <a:t>Klasse Fahrrad</a:t>
-            </a:r>
-          </a:p>
-        </p:txBody>
-      </p:sp>
-      <p:sp>
-        <p:nvSpPr>
-          <p:cNvPr id="12" name="TextBox 11"/>
+              <a:t>Klasse
+Fahrrad</a:t>
+            </a:r>
+          </a:p>
+        </p:txBody>
+      </p:sp>
+      <p:sp>
+        <p:nvSpPr>
+          <p:cNvPr id="10" name="TextBox 9"/>
           <p:cNvSpPr txBox="1"/>
           <p:nvPr/>
         </p:nvSpPr>
         <p:spPr>
           <a:xfrm>
-            <a:off x="502920" y="6510528"/>
-            <a:ext cx="11064240" cy="182880"/>
+            <a:off x="365760" y="6510528"/>
+            <a:ext cx="11430000" cy="228600"/>
           </a:xfrm>
           <a:prstGeom prst="rect">
             <a:avLst/>
@@ -6309,7 +5151,7 @@
             <a:r>
               <a:rPr sz="800">
                 <a:solidFill>
-                  <a:srgbClr val="646464"/>
+                  <a:srgbClr val="6E6E6E"/>
                 </a:solidFill>
               </a:rPr>
               <a:t>Grafik: eigene Darstellung</a:t>
@@ -6344,13 +5186,13 @@
         <p:spPr>
           <a:xfrm>
             <a:off x="0" y="0"/>
-            <a:ext cx="12191695" cy="100584"/>
+            <a:ext cx="12191695" cy="109728"/>
           </a:xfrm>
           <a:prstGeom prst="rect">
             <a:avLst/>
           </a:prstGeom>
           <a:solidFill>
-            <a:srgbClr val="4472C4"/>
+            <a:srgbClr val="305396"/>
           </a:solidFill>
           <a:ln>
             <a:noFill/>
@@ -6387,7 +5229,7 @@
         <p:spPr>
           <a:xfrm>
             <a:off x="594360" y="320040"/>
-            <a:ext cx="10972800" cy="502920"/>
+            <a:ext cx="10972800" cy="548640"/>
           </a:xfrm>
           <a:prstGeom prst="rect">
             <a:avLst/>
@@ -6403,10 +5245,10 @@
             <a:r>
               <a:rPr sz="2600" b="1">
                 <a:solidFill>
-                  <a:srgbClr val="1F374E"/>
+                  <a:srgbClr val="202C3C"/>
                 </a:solidFill>
               </a:rPr>
-              <a:t>Eigenschaften werden Attribute</a:t>
+              <a:t>Klasse als Bauplan</a:t>
             </a:r>
           </a:p>
         </p:txBody>
@@ -6420,7 +5262,7 @@
         <p:spPr>
           <a:xfrm>
             <a:off x="685800" y="1234440"/>
-            <a:ext cx="5303520" cy="4937760"/>
+            <a:ext cx="5394960" cy="5029200"/>
           </a:xfrm>
           <a:prstGeom prst="rect">
             <a:avLst/>
@@ -6435,46 +5277,61 @@
           <a:p>
             <a:pPr>
               <a:spcAft>
-                <a:spcPts val="800"/>
+                <a:spcPts val="700"/>
               </a:spcAft>
               <a:defRPr sz="1900">
                 <a:solidFill>
-                  <a:srgbClr val="232323"/>
+                  <a:srgbClr val="1E1E1E"/>
                 </a:solidFill>
               </a:defRPr>
             </a:pPr>
             <a:r>
-              <a:t>Attribut = benannte Eigenschaft eines Objekts</a:t>
+              <a:t>Eine Klasse beschreibt gleichartige Objekte.</a:t>
             </a:r>
           </a:p>
           <a:p>
             <a:pPr>
               <a:spcAft>
-                <a:spcPts val="800"/>
+                <a:spcPts val="700"/>
               </a:spcAft>
               <a:defRPr sz="1900">
                 <a:solidFill>
-                  <a:srgbClr val="232323"/>
+                  <a:srgbClr val="1E1E1E"/>
                 </a:solidFill>
               </a:defRPr>
             </a:pPr>
             <a:r>
-              <a:t>Attributwert = aktueller Wert dieser Eigenschaft</a:t>
+              <a:t>Sie legt typische Attribute fest.</a:t>
             </a:r>
           </a:p>
           <a:p>
             <a:pPr>
               <a:spcAft>
-                <a:spcPts val="800"/>
+                <a:spcPts val="700"/>
               </a:spcAft>
               <a:defRPr sz="1900">
                 <a:solidFill>
-                  <a:srgbClr val="232323"/>
+                  <a:srgbClr val="1E1E1E"/>
                 </a:solidFill>
               </a:defRPr>
             </a:pPr>
             <a:r>
-              <a:t>Beispiel: farbe = rot, gänge = 7</a:t>
+              <a:t>Sie beschreibt mögliche Methoden.</a:t>
+            </a:r>
+          </a:p>
+          <a:p>
+            <a:pPr>
+              <a:spcAft>
+                <a:spcPts val="700"/>
+              </a:spcAft>
+              <a:defRPr sz="1900">
+                <a:solidFill>
+                  <a:srgbClr val="1E1E1E"/>
+                </a:solidFill>
+              </a:defRPr>
+            </a:pPr>
+            <a:r>
+              <a:t>Objekte sind konkrete Ausprägungen.</a:t>
             </a:r>
           </a:p>
         </p:txBody>
@@ -6487,18 +5344,18 @@
         </p:nvSpPr>
         <p:spPr>
           <a:xfrm>
-            <a:off x="6400800" y="1371600"/>
-            <a:ext cx="1828800" cy="640080"/>
+            <a:off x="6858000" y="1554480"/>
+            <a:ext cx="3840480" cy="2468880"/>
           </a:xfrm>
           <a:prstGeom prst="roundRect">
             <a:avLst/>
           </a:prstGeom>
           <a:solidFill>
-            <a:srgbClr val="DCE6F1"/>
+            <a:srgbClr val="DDEEDD"/>
           </a:solidFill>
           <a:ln>
             <a:solidFill>
-              <a:srgbClr val="4472C4"/>
+              <a:srgbClr val="305396"/>
             </a:solidFill>
           </a:ln>
         </p:spPr>
@@ -6524,342 +5381,26 @@
             <a:r>
               <a:rPr sz="1600" b="1">
                 <a:solidFill>
-                  <a:srgbClr val="1F374E"/>
+                  <a:srgbClr val="202C3C"/>
                 </a:solidFill>
               </a:rPr>
-              <a:t>Fahrrad A</a:t>
-            </a:r>
-          </a:p>
-        </p:txBody>
-      </p:sp>
-      <p:sp>
-        <p:nvSpPr>
-          <p:cNvPr id="6" name="Rounded Rectangle 5"/>
-          <p:cNvSpPr/>
-          <p:nvPr/>
-        </p:nvSpPr>
-        <p:spPr>
-          <a:xfrm>
-            <a:off x="8503920" y="1371600"/>
-            <a:ext cx="1828800" cy="640080"/>
-          </a:xfrm>
-          <a:prstGeom prst="roundRect">
-            <a:avLst/>
-          </a:prstGeom>
-          <a:solidFill>
-            <a:srgbClr val="DCE6F1"/>
-          </a:solidFill>
-          <a:ln>
-            <a:solidFill>
-              <a:srgbClr val="4472C4"/>
-            </a:solidFill>
-          </a:ln>
-        </p:spPr>
-        <p:style>
-          <a:lnRef idx="1">
-            <a:schemeClr val="accent1"/>
-          </a:lnRef>
-          <a:fillRef idx="3">
-            <a:schemeClr val="accent1"/>
-          </a:fillRef>
-          <a:effectRef idx="2">
-            <a:schemeClr val="accent1"/>
-          </a:effectRef>
-          <a:fontRef idx="minor">
-            <a:schemeClr val="lt1"/>
-          </a:fontRef>
-        </p:style>
-        <p:txBody>
-          <a:bodyPr rtlCol="0" anchor="ctr" wrap="square"/>
-          <a:lstStyle/>
-          <a:p>
-            <a:pPr algn="ctr"/>
-            <a:r>
-              <a:rPr sz="1600" b="1">
-                <a:solidFill>
-                  <a:srgbClr val="1F374E"/>
-                </a:solidFill>
-              </a:rPr>
-              <a:t>Fahrrad B</a:t>
-            </a:r>
-          </a:p>
-        </p:txBody>
-      </p:sp>
-      <p:sp>
-        <p:nvSpPr>
-          <p:cNvPr id="7" name="Rounded Rectangle 6"/>
-          <p:cNvSpPr/>
-          <p:nvPr/>
-        </p:nvSpPr>
-        <p:spPr>
-          <a:xfrm>
-            <a:off x="6400800" y="2377440"/>
-            <a:ext cx="1828800" cy="502920"/>
-          </a:xfrm>
-          <a:prstGeom prst="roundRect">
-            <a:avLst/>
-          </a:prstGeom>
-          <a:solidFill>
-            <a:srgbClr val="FFE699"/>
-          </a:solidFill>
-          <a:ln>
-            <a:solidFill>
-              <a:srgbClr val="4472C4"/>
-            </a:solidFill>
-          </a:ln>
-        </p:spPr>
-        <p:style>
-          <a:lnRef idx="1">
-            <a:schemeClr val="accent1"/>
-          </a:lnRef>
-          <a:fillRef idx="3">
-            <a:schemeClr val="accent1"/>
-          </a:fillRef>
-          <a:effectRef idx="2">
-            <a:schemeClr val="accent1"/>
-          </a:effectRef>
-          <a:fontRef idx="minor">
-            <a:schemeClr val="lt1"/>
-          </a:fontRef>
-        </p:style>
-        <p:txBody>
-          <a:bodyPr rtlCol="0" anchor="ctr" wrap="square"/>
-          <a:lstStyle/>
-          <a:p>
-            <a:pPr algn="ctr"/>
-            <a:r>
-              <a:rPr sz="1300" b="1">
-                <a:solidFill>
-                  <a:srgbClr val="1F374E"/>
-                </a:solidFill>
-              </a:rPr>
-              <a:t>farbe = rot</a:t>
-            </a:r>
-          </a:p>
-        </p:txBody>
-      </p:sp>
-      <p:sp>
-        <p:nvSpPr>
-          <p:cNvPr id="8" name="Rounded Rectangle 7"/>
-          <p:cNvSpPr/>
-          <p:nvPr/>
-        </p:nvSpPr>
-        <p:spPr>
-          <a:xfrm>
-            <a:off x="8503920" y="2377440"/>
-            <a:ext cx="1828800" cy="502920"/>
-          </a:xfrm>
-          <a:prstGeom prst="roundRect">
-            <a:avLst/>
-          </a:prstGeom>
-          <a:solidFill>
-            <a:srgbClr val="FFE699"/>
-          </a:solidFill>
-          <a:ln>
-            <a:solidFill>
-              <a:srgbClr val="4472C4"/>
-            </a:solidFill>
-          </a:ln>
-        </p:spPr>
-        <p:style>
-          <a:lnRef idx="1">
-            <a:schemeClr val="accent1"/>
-          </a:lnRef>
-          <a:fillRef idx="3">
-            <a:schemeClr val="accent1"/>
-          </a:fillRef>
-          <a:effectRef idx="2">
-            <a:schemeClr val="accent1"/>
-          </a:effectRef>
-          <a:fontRef idx="minor">
-            <a:schemeClr val="lt1"/>
-          </a:fontRef>
-        </p:style>
-        <p:txBody>
-          <a:bodyPr rtlCol="0" anchor="ctr" wrap="square"/>
-          <a:lstStyle/>
-          <a:p>
-            <a:pPr algn="ctr"/>
-            <a:r>
-              <a:rPr sz="1300" b="1">
-                <a:solidFill>
-                  <a:srgbClr val="1F374E"/>
-                </a:solidFill>
-              </a:rPr>
-              <a:t>farbe = blau</a:t>
-            </a:r>
-          </a:p>
-        </p:txBody>
-      </p:sp>
-      <p:sp>
-        <p:nvSpPr>
-          <p:cNvPr id="9" name="Rounded Rectangle 8"/>
-          <p:cNvSpPr/>
-          <p:nvPr/>
-        </p:nvSpPr>
-        <p:spPr>
-          <a:xfrm>
-            <a:off x="6400800" y="3063240"/>
-            <a:ext cx="1828800" cy="502920"/>
-          </a:xfrm>
-          <a:prstGeom prst="roundRect">
-            <a:avLst/>
-          </a:prstGeom>
-          <a:solidFill>
-            <a:srgbClr val="F2F6FA"/>
-          </a:solidFill>
-          <a:ln>
-            <a:solidFill>
-              <a:srgbClr val="4472C4"/>
-            </a:solidFill>
-          </a:ln>
-        </p:spPr>
-        <p:style>
-          <a:lnRef idx="1">
-            <a:schemeClr val="accent1"/>
-          </a:lnRef>
-          <a:fillRef idx="3">
-            <a:schemeClr val="accent1"/>
-          </a:fillRef>
-          <a:effectRef idx="2">
-            <a:schemeClr val="accent1"/>
-          </a:effectRef>
-          <a:fontRef idx="minor">
-            <a:schemeClr val="lt1"/>
-          </a:fontRef>
-        </p:style>
-        <p:txBody>
-          <a:bodyPr rtlCol="0" anchor="ctr" wrap="square"/>
-          <a:lstStyle/>
-          <a:p>
-            <a:pPr algn="ctr"/>
-            <a:r>
-              <a:rPr sz="1300" b="1">
-                <a:solidFill>
-                  <a:srgbClr val="1F374E"/>
-                </a:solidFill>
-              </a:rPr>
-              <a:t>gänge = 7</a:t>
-            </a:r>
-          </a:p>
-        </p:txBody>
-      </p:sp>
-      <p:sp>
-        <p:nvSpPr>
-          <p:cNvPr id="10" name="Rounded Rectangle 9"/>
-          <p:cNvSpPr/>
-          <p:nvPr/>
-        </p:nvSpPr>
-        <p:spPr>
-          <a:xfrm>
-            <a:off x="8503920" y="3063240"/>
-            <a:ext cx="1828800" cy="502920"/>
-          </a:xfrm>
-          <a:prstGeom prst="roundRect">
-            <a:avLst/>
-          </a:prstGeom>
-          <a:solidFill>
-            <a:srgbClr val="F2F6FA"/>
-          </a:solidFill>
-          <a:ln>
-            <a:solidFill>
-              <a:srgbClr val="4472C4"/>
-            </a:solidFill>
-          </a:ln>
-        </p:spPr>
-        <p:style>
-          <a:lnRef idx="1">
-            <a:schemeClr val="accent1"/>
-          </a:lnRef>
-          <a:fillRef idx="3">
-            <a:schemeClr val="accent1"/>
-          </a:fillRef>
-          <a:effectRef idx="2">
-            <a:schemeClr val="accent1"/>
-          </a:effectRef>
-          <a:fontRef idx="minor">
-            <a:schemeClr val="lt1"/>
-          </a:fontRef>
-        </p:style>
-        <p:txBody>
-          <a:bodyPr rtlCol="0" anchor="ctr" wrap="square"/>
-          <a:lstStyle/>
-          <a:p>
-            <a:pPr algn="ctr"/>
-            <a:r>
-              <a:rPr sz="1300" b="1">
-                <a:solidFill>
-                  <a:srgbClr val="1F374E"/>
-                </a:solidFill>
-              </a:rPr>
-              <a:t>gänge = 21</a:t>
-            </a:r>
-          </a:p>
-        </p:txBody>
-      </p:sp>
-      <p:sp>
-        <p:nvSpPr>
-          <p:cNvPr id="11" name="Rounded Rectangle 10"/>
-          <p:cNvSpPr/>
-          <p:nvPr/>
-        </p:nvSpPr>
-        <p:spPr>
-          <a:xfrm>
-            <a:off x="7452360" y="4160520"/>
-            <a:ext cx="2011680" cy="640080"/>
-          </a:xfrm>
-          <a:prstGeom prst="roundRect">
-            <a:avLst/>
-          </a:prstGeom>
-          <a:solidFill>
-            <a:srgbClr val="E2EFDA"/>
-          </a:solidFill>
-          <a:ln>
-            <a:solidFill>
-              <a:srgbClr val="4472C4"/>
-            </a:solidFill>
-          </a:ln>
-        </p:spPr>
-        <p:style>
-          <a:lnRef idx="1">
-            <a:schemeClr val="accent1"/>
-          </a:lnRef>
-          <a:fillRef idx="3">
-            <a:schemeClr val="accent1"/>
-          </a:fillRef>
-          <a:effectRef idx="2">
-            <a:schemeClr val="accent1"/>
-          </a:effectRef>
-          <a:fontRef idx="minor">
-            <a:schemeClr val="lt1"/>
-          </a:fontRef>
-        </p:style>
-        <p:txBody>
-          <a:bodyPr rtlCol="0" anchor="ctr" wrap="square"/>
-          <a:lstStyle/>
-          <a:p>
-            <a:pPr algn="ctr"/>
-            <a:r>
-              <a:rPr sz="1500" b="1">
-                <a:solidFill>
-                  <a:srgbClr val="1F374E"/>
-                </a:solidFill>
-              </a:rPr>
-              <a:t>Klasse Fahrrad</a:t>
-            </a:r>
-          </a:p>
-        </p:txBody>
-      </p:sp>
-      <p:sp>
-        <p:nvSpPr>
-          <p:cNvPr id="12" name="TextBox 11"/>
+              <a:t>Klasse Fahrrad
+Attribute: farbe, gaenge
+Methoden: bremsen(), schalten()</a:t>
+            </a:r>
+          </a:p>
+        </p:txBody>
+      </p:sp>
+      <p:sp>
+        <p:nvSpPr>
+          <p:cNvPr id="6" name="TextBox 5"/>
           <p:cNvSpPr txBox="1"/>
           <p:nvPr/>
         </p:nvSpPr>
         <p:spPr>
           <a:xfrm>
-            <a:off x="502920" y="6510528"/>
-            <a:ext cx="11064240" cy="182880"/>
+            <a:off x="365760" y="6510528"/>
+            <a:ext cx="11430000" cy="228600"/>
           </a:xfrm>
           <a:prstGeom prst="rect">
             <a:avLst/>
@@ -6876,7 +5417,7 @@
             <a:r>
               <a:rPr sz="800">
                 <a:solidFill>
-                  <a:srgbClr val="646464"/>
+                  <a:srgbClr val="6E6E6E"/>
                 </a:solidFill>
               </a:rPr>
               <a:t>Grafik: eigene Darstellung</a:t>
@@ -6911,13 +5452,13 @@
         <p:spPr>
           <a:xfrm>
             <a:off x="0" y="0"/>
-            <a:ext cx="12191695" cy="100584"/>
+            <a:ext cx="12191695" cy="109728"/>
           </a:xfrm>
           <a:prstGeom prst="rect">
             <a:avLst/>
           </a:prstGeom>
           <a:solidFill>
-            <a:srgbClr val="4472C4"/>
+            <a:srgbClr val="305396"/>
           </a:solidFill>
           <a:ln>
             <a:noFill/>
@@ -6954,7 +5495,7 @@
         <p:spPr>
           <a:xfrm>
             <a:off x="594360" y="320040"/>
-            <a:ext cx="10972800" cy="502920"/>
+            <a:ext cx="10972800" cy="548640"/>
           </a:xfrm>
           <a:prstGeom prst="rect">
             <a:avLst/>
@@ -6970,10 +5511,10 @@
             <a:r>
               <a:rPr sz="2600" b="1">
                 <a:solidFill>
-                  <a:srgbClr val="1F374E"/>
+                  <a:srgbClr val="202C3C"/>
                 </a:solidFill>
               </a:rPr>
-              <a:t>Mehrere ähnliche Objekte</a:t>
+              <a:t>Methoden beschreiben Verhalten</a:t>
             </a:r>
           </a:p>
         </p:txBody>
@@ -6987,7 +5528,7 @@
         <p:spPr>
           <a:xfrm>
             <a:off x="685800" y="1234440"/>
-            <a:ext cx="5303520" cy="4937760"/>
+            <a:ext cx="5394960" cy="5029200"/>
           </a:xfrm>
           <a:prstGeom prst="rect">
             <a:avLst/>
@@ -7002,70 +5543,85 @@
           <a:p>
             <a:pPr>
               <a:spcAft>
-                <a:spcPts val="800"/>
+                <a:spcPts val="700"/>
               </a:spcAft>
               <a:defRPr sz="1900">
                 <a:solidFill>
-                  <a:srgbClr val="232323"/>
+                  <a:srgbClr val="1E1E1E"/>
                 </a:solidFill>
               </a:defRPr>
             </a:pPr>
             <a:r>
-              <a:t>Fahrräder haben ähnliche Arten von Attributen.</a:t>
+              <a:t>Attribute beschreiben Zustand.</a:t>
             </a:r>
           </a:p>
           <a:p>
             <a:pPr>
               <a:spcAft>
-                <a:spcPts val="800"/>
+                <a:spcPts val="700"/>
               </a:spcAft>
               <a:defRPr sz="1900">
                 <a:solidFill>
-                  <a:srgbClr val="232323"/>
+                  <a:srgbClr val="1E1E1E"/>
                 </a:solidFill>
               </a:defRPr>
             </a:pPr>
             <a:r>
-              <a:t>Die Attributwerte können unterschiedlich sein.</a:t>
+              <a:t>Methoden beschreiben Aktionen.</a:t>
             </a:r>
           </a:p>
           <a:p>
             <a:pPr>
               <a:spcAft>
-                <a:spcPts val="800"/>
+                <a:spcPts val="700"/>
               </a:spcAft>
               <a:defRPr sz="1900">
                 <a:solidFill>
-                  <a:srgbClr val="232323"/>
+                  <a:srgbClr val="1E1E1E"/>
                 </a:solidFill>
               </a:defRPr>
             </a:pPr>
             <a:r>
-              <a:t>Wir suchen eine gemeinsame Beschreibung.</a:t>
-            </a:r>
-          </a:p>
-        </p:txBody>
-      </p:sp>
-      <p:sp>
-        <p:nvSpPr>
-          <p:cNvPr id="5" name="Rounded Rectangle 4"/>
+              <a:t>Methoden können Werte ändern.</a:t>
+            </a:r>
+          </a:p>
+          <a:p>
+            <a:pPr>
+              <a:spcAft>
+                <a:spcPts val="700"/>
+              </a:spcAft>
+              <a:defRPr sz="1900">
+                <a:solidFill>
+                  <a:srgbClr val="1E1E1E"/>
+                </a:solidFill>
+              </a:defRPr>
+            </a:pPr>
+            <a:r>
+              <a:t>Ausgeführt wird eine Methode erst beim Aufruf.</a:t>
+            </a:r>
+          </a:p>
+        </p:txBody>
+      </p:sp>
+      <p:sp>
+        <p:nvSpPr>
+          <p:cNvPr id="5" name="Rectangle 4"/>
           <p:cNvSpPr/>
           <p:nvPr/>
         </p:nvSpPr>
         <p:spPr>
           <a:xfrm>
-            <a:off x="6400800" y="1371600"/>
-            <a:ext cx="1828800" cy="640080"/>
-          </a:xfrm>
-          <a:prstGeom prst="roundRect">
+            <a:off x="6400800" y="1417320"/>
+            <a:ext cx="4754880" cy="3200400"/>
+          </a:xfrm>
+          <a:prstGeom prst="rect">
             <a:avLst/>
           </a:prstGeom>
           <a:solidFill>
-            <a:srgbClr val="DCE6F1"/>
+            <a:srgbClr val="FCFCFC"/>
           </a:solidFill>
           <a:ln>
             <a:solidFill>
-              <a:srgbClr val="4472C4"/>
+              <a:srgbClr val="6E6E6E"/>
             </a:solidFill>
           </a:ln>
         </p:spPr>
@@ -7084,349 +5640,36 @@
           </a:fontRef>
         </p:style>
         <p:txBody>
-          <a:bodyPr rtlCol="0" anchor="ctr" wrap="square"/>
+          <a:bodyPr rtlCol="0" anchor="ctr" wrap="none"/>
           <a:lstStyle/>
           <a:p>
             <a:pPr algn="ctr"/>
             <a:r>
-              <a:rPr sz="1600" b="1">
+              <a:rPr sz="1600">
                 <a:solidFill>
-                  <a:srgbClr val="1F374E"/>
+                  <a:srgbClr val="1E1E1E"/>
                 </a:solidFill>
+                <a:latin typeface="Consolas"/>
               </a:rPr>
-              <a:t>Fahrrad A</a:t>
-            </a:r>
-          </a:p>
-        </p:txBody>
-      </p:sp>
-      <p:sp>
-        <p:nvSpPr>
-          <p:cNvPr id="6" name="Rounded Rectangle 5"/>
-          <p:cNvSpPr/>
-          <p:nvPr/>
-        </p:nvSpPr>
-        <p:spPr>
-          <a:xfrm>
-            <a:off x="8503920" y="1371600"/>
-            <a:ext cx="1828800" cy="640080"/>
-          </a:xfrm>
-          <a:prstGeom prst="roundRect">
-            <a:avLst/>
-          </a:prstGeom>
-          <a:solidFill>
-            <a:srgbClr val="DCE6F1"/>
-          </a:solidFill>
-          <a:ln>
-            <a:solidFill>
-              <a:srgbClr val="4472C4"/>
-            </a:solidFill>
-          </a:ln>
-        </p:spPr>
-        <p:style>
-          <a:lnRef idx="1">
-            <a:schemeClr val="accent1"/>
-          </a:lnRef>
-          <a:fillRef idx="3">
-            <a:schemeClr val="accent1"/>
-          </a:fillRef>
-          <a:effectRef idx="2">
-            <a:schemeClr val="accent1"/>
-          </a:effectRef>
-          <a:fontRef idx="minor">
-            <a:schemeClr val="lt1"/>
-          </a:fontRef>
-        </p:style>
-        <p:txBody>
-          <a:bodyPr rtlCol="0" anchor="ctr" wrap="square"/>
-          <a:lstStyle/>
-          <a:p>
-            <a:pPr algn="ctr"/>
-            <a:r>
-              <a:rPr sz="1600" b="1">
-                <a:solidFill>
-                  <a:srgbClr val="1F374E"/>
-                </a:solidFill>
-              </a:rPr>
-              <a:t>Fahrrad B</a:t>
-            </a:r>
-          </a:p>
-        </p:txBody>
-      </p:sp>
-      <p:sp>
-        <p:nvSpPr>
-          <p:cNvPr id="7" name="Rounded Rectangle 6"/>
-          <p:cNvSpPr/>
-          <p:nvPr/>
-        </p:nvSpPr>
-        <p:spPr>
-          <a:xfrm>
-            <a:off x="6400800" y="2377440"/>
-            <a:ext cx="1828800" cy="502920"/>
-          </a:xfrm>
-          <a:prstGeom prst="roundRect">
-            <a:avLst/>
-          </a:prstGeom>
-          <a:solidFill>
-            <a:srgbClr val="FFE699"/>
-          </a:solidFill>
-          <a:ln>
-            <a:solidFill>
-              <a:srgbClr val="4472C4"/>
-            </a:solidFill>
-          </a:ln>
-        </p:spPr>
-        <p:style>
-          <a:lnRef idx="1">
-            <a:schemeClr val="accent1"/>
-          </a:lnRef>
-          <a:fillRef idx="3">
-            <a:schemeClr val="accent1"/>
-          </a:fillRef>
-          <a:effectRef idx="2">
-            <a:schemeClr val="accent1"/>
-          </a:effectRef>
-          <a:fontRef idx="minor">
-            <a:schemeClr val="lt1"/>
-          </a:fontRef>
-        </p:style>
-        <p:txBody>
-          <a:bodyPr rtlCol="0" anchor="ctr" wrap="square"/>
-          <a:lstStyle/>
-          <a:p>
-            <a:pPr algn="ctr"/>
-            <a:r>
-              <a:rPr sz="1300" b="1">
-                <a:solidFill>
-                  <a:srgbClr val="1F374E"/>
-                </a:solidFill>
-              </a:rPr>
-              <a:t>farbe = rot</a:t>
-            </a:r>
-          </a:p>
-        </p:txBody>
-      </p:sp>
-      <p:sp>
-        <p:nvSpPr>
-          <p:cNvPr id="8" name="Rounded Rectangle 7"/>
-          <p:cNvSpPr/>
-          <p:nvPr/>
-        </p:nvSpPr>
-        <p:spPr>
-          <a:xfrm>
-            <a:off x="8503920" y="2377440"/>
-            <a:ext cx="1828800" cy="502920"/>
-          </a:xfrm>
-          <a:prstGeom prst="roundRect">
-            <a:avLst/>
-          </a:prstGeom>
-          <a:solidFill>
-            <a:srgbClr val="FFE699"/>
-          </a:solidFill>
-          <a:ln>
-            <a:solidFill>
-              <a:srgbClr val="4472C4"/>
-            </a:solidFill>
-          </a:ln>
-        </p:spPr>
-        <p:style>
-          <a:lnRef idx="1">
-            <a:schemeClr val="accent1"/>
-          </a:lnRef>
-          <a:fillRef idx="3">
-            <a:schemeClr val="accent1"/>
-          </a:fillRef>
-          <a:effectRef idx="2">
-            <a:schemeClr val="accent1"/>
-          </a:effectRef>
-          <a:fontRef idx="minor">
-            <a:schemeClr val="lt1"/>
-          </a:fontRef>
-        </p:style>
-        <p:txBody>
-          <a:bodyPr rtlCol="0" anchor="ctr" wrap="square"/>
-          <a:lstStyle/>
-          <a:p>
-            <a:pPr algn="ctr"/>
-            <a:r>
-              <a:rPr sz="1300" b="1">
-                <a:solidFill>
-                  <a:srgbClr val="1F374E"/>
-                </a:solidFill>
-              </a:rPr>
-              <a:t>farbe = blau</a:t>
-            </a:r>
-          </a:p>
-        </p:txBody>
-      </p:sp>
-      <p:sp>
-        <p:nvSpPr>
-          <p:cNvPr id="9" name="Rounded Rectangle 8"/>
-          <p:cNvSpPr/>
-          <p:nvPr/>
-        </p:nvSpPr>
-        <p:spPr>
-          <a:xfrm>
-            <a:off x="6400800" y="3063240"/>
-            <a:ext cx="1828800" cy="502920"/>
-          </a:xfrm>
-          <a:prstGeom prst="roundRect">
-            <a:avLst/>
-          </a:prstGeom>
-          <a:solidFill>
-            <a:srgbClr val="F2F6FA"/>
-          </a:solidFill>
-          <a:ln>
-            <a:solidFill>
-              <a:srgbClr val="4472C4"/>
-            </a:solidFill>
-          </a:ln>
-        </p:spPr>
-        <p:style>
-          <a:lnRef idx="1">
-            <a:schemeClr val="accent1"/>
-          </a:lnRef>
-          <a:fillRef idx="3">
-            <a:schemeClr val="accent1"/>
-          </a:fillRef>
-          <a:effectRef idx="2">
-            <a:schemeClr val="accent1"/>
-          </a:effectRef>
-          <a:fontRef idx="minor">
-            <a:schemeClr val="lt1"/>
-          </a:fontRef>
-        </p:style>
-        <p:txBody>
-          <a:bodyPr rtlCol="0" anchor="ctr" wrap="square"/>
-          <a:lstStyle/>
-          <a:p>
-            <a:pPr algn="ctr"/>
-            <a:r>
-              <a:rPr sz="1300" b="1">
-                <a:solidFill>
-                  <a:srgbClr val="1F374E"/>
-                </a:solidFill>
-              </a:rPr>
-              <a:t>gänge = 7</a:t>
-            </a:r>
-          </a:p>
-        </p:txBody>
-      </p:sp>
-      <p:sp>
-        <p:nvSpPr>
-          <p:cNvPr id="10" name="Rounded Rectangle 9"/>
-          <p:cNvSpPr/>
-          <p:nvPr/>
-        </p:nvSpPr>
-        <p:spPr>
-          <a:xfrm>
-            <a:off x="8503920" y="3063240"/>
-            <a:ext cx="1828800" cy="502920"/>
-          </a:xfrm>
-          <a:prstGeom prst="roundRect">
-            <a:avLst/>
-          </a:prstGeom>
-          <a:solidFill>
-            <a:srgbClr val="F2F6FA"/>
-          </a:solidFill>
-          <a:ln>
-            <a:solidFill>
-              <a:srgbClr val="4472C4"/>
-            </a:solidFill>
-          </a:ln>
-        </p:spPr>
-        <p:style>
-          <a:lnRef idx="1">
-            <a:schemeClr val="accent1"/>
-          </a:lnRef>
-          <a:fillRef idx="3">
-            <a:schemeClr val="accent1"/>
-          </a:fillRef>
-          <a:effectRef idx="2">
-            <a:schemeClr val="accent1"/>
-          </a:effectRef>
-          <a:fontRef idx="minor">
-            <a:schemeClr val="lt1"/>
-          </a:fontRef>
-        </p:style>
-        <p:txBody>
-          <a:bodyPr rtlCol="0" anchor="ctr" wrap="square"/>
-          <a:lstStyle/>
-          <a:p>
-            <a:pPr algn="ctr"/>
-            <a:r>
-              <a:rPr sz="1300" b="1">
-                <a:solidFill>
-                  <a:srgbClr val="1F374E"/>
-                </a:solidFill>
-              </a:rPr>
-              <a:t>gänge = 21</a:t>
-            </a:r>
-          </a:p>
-        </p:txBody>
-      </p:sp>
-      <p:sp>
-        <p:nvSpPr>
-          <p:cNvPr id="11" name="Rounded Rectangle 10"/>
-          <p:cNvSpPr/>
-          <p:nvPr/>
-        </p:nvSpPr>
-        <p:spPr>
-          <a:xfrm>
-            <a:off x="7452360" y="4160520"/>
-            <a:ext cx="2011680" cy="640080"/>
-          </a:xfrm>
-          <a:prstGeom prst="roundRect">
-            <a:avLst/>
-          </a:prstGeom>
-          <a:solidFill>
-            <a:srgbClr val="E2EFDA"/>
-          </a:solidFill>
-          <a:ln>
-            <a:solidFill>
-              <a:srgbClr val="4472C4"/>
-            </a:solidFill>
-          </a:ln>
-        </p:spPr>
-        <p:style>
-          <a:lnRef idx="1">
-            <a:schemeClr val="accent1"/>
-          </a:lnRef>
-          <a:fillRef idx="3">
-            <a:schemeClr val="accent1"/>
-          </a:fillRef>
-          <a:effectRef idx="2">
-            <a:schemeClr val="accent1"/>
-          </a:effectRef>
-          <a:fontRef idx="minor">
-            <a:schemeClr val="lt1"/>
-          </a:fontRef>
-        </p:style>
-        <p:txBody>
-          <a:bodyPr rtlCol="0" anchor="ctr" wrap="square"/>
-          <a:lstStyle/>
-          <a:p>
-            <a:pPr algn="ctr"/>
-            <a:r>
-              <a:rPr sz="1500" b="1">
-                <a:solidFill>
-                  <a:srgbClr val="1F374E"/>
-                </a:solidFill>
-              </a:rPr>
-              <a:t>Klasse Fahrrad</a:t>
-            </a:r>
-          </a:p>
-        </p:txBody>
-      </p:sp>
-      <p:sp>
-        <p:nvSpPr>
-          <p:cNvPr id="12" name="TextBox 11"/>
+              <a:t>Definition:
+einschalten()
+Aufrufe:
+einschalten()
+einschalten()</a:t>
+            </a:r>
+          </a:p>
+        </p:txBody>
+      </p:sp>
+      <p:sp>
+        <p:nvSpPr>
+          <p:cNvPr id="6" name="TextBox 5"/>
           <p:cNvSpPr txBox="1"/>
           <p:nvPr/>
         </p:nvSpPr>
         <p:spPr>
           <a:xfrm>
-            <a:off x="502920" y="6510528"/>
-            <a:ext cx="11064240" cy="182880"/>
+            <a:off x="365760" y="6510528"/>
+            <a:ext cx="11430000" cy="228600"/>
           </a:xfrm>
           <a:prstGeom prst="rect">
             <a:avLst/>
@@ -7443,7 +5686,7 @@
             <a:r>
               <a:rPr sz="800">
                 <a:solidFill>
-                  <a:srgbClr val="646464"/>
+                  <a:srgbClr val="6E6E6E"/>
                 </a:solidFill>
               </a:rPr>
               <a:t>Grafik: eigene Darstellung</a:t>
@@ -7478,13 +5721,13 @@
         <p:spPr>
           <a:xfrm>
             <a:off x="0" y="0"/>
-            <a:ext cx="12191695" cy="100584"/>
+            <a:ext cx="12191695" cy="109728"/>
           </a:xfrm>
           <a:prstGeom prst="rect">
             <a:avLst/>
           </a:prstGeom>
           <a:solidFill>
-            <a:srgbClr val="4472C4"/>
+            <a:srgbClr val="305396"/>
           </a:solidFill>
           <a:ln>
             <a:noFill/>
@@ -7521,7 +5764,7 @@
         <p:spPr>
           <a:xfrm>
             <a:off x="594360" y="320040"/>
-            <a:ext cx="10972800" cy="502920"/>
+            <a:ext cx="10972800" cy="548640"/>
           </a:xfrm>
           <a:prstGeom prst="rect">
             <a:avLst/>
@@ -7537,10 +5780,10 @@
             <a:r>
               <a:rPr sz="2600" b="1">
                 <a:solidFill>
-                  <a:srgbClr val="1F374E"/>
+                  <a:srgbClr val="202C3C"/>
                 </a:solidFill>
               </a:rPr>
-              <a:t>Die Klasse als Bauplan</a:t>
+              <a:t>Objektkarte erstellen</a:t>
             </a:r>
           </a:p>
         </p:txBody>
@@ -7554,7 +5797,7 @@
         <p:spPr>
           <a:xfrm>
             <a:off x="685800" y="1234440"/>
-            <a:ext cx="5303520" cy="4937760"/>
+            <a:ext cx="5394960" cy="5029200"/>
           </a:xfrm>
           <a:prstGeom prst="rect">
             <a:avLst/>
@@ -7569,46 +5812,61 @@
           <a:p>
             <a:pPr>
               <a:spcAft>
-                <a:spcPts val="800"/>
+                <a:spcPts val="700"/>
               </a:spcAft>
               <a:defRPr sz="1900">
                 <a:solidFill>
-                  <a:srgbClr val="232323"/>
+                  <a:srgbClr val="1E1E1E"/>
                 </a:solidFill>
               </a:defRPr>
             </a:pPr>
             <a:r>
-              <a:t>Eine Klasse beschreibt gleichartige Objekte.</a:t>
+              <a:t>Wähle ein Alltagsobjekt.</a:t>
             </a:r>
           </a:p>
           <a:p>
             <a:pPr>
               <a:spcAft>
-                <a:spcPts val="800"/>
+                <a:spcPts val="700"/>
               </a:spcAft>
               <a:defRPr sz="1900">
                 <a:solidFill>
-                  <a:srgbClr val="232323"/>
+                  <a:srgbClr val="1E1E1E"/>
                 </a:solidFill>
               </a:defRPr>
             </a:pPr>
             <a:r>
-              <a:t>Sie legt typische Attribute und mögliche Methoden fest.</a:t>
+              <a:t>Notiere Klasse und drei Attribute mit Werten.</a:t>
             </a:r>
           </a:p>
           <a:p>
             <a:pPr>
               <a:spcAft>
-                <a:spcPts val="800"/>
+                <a:spcPts val="700"/>
               </a:spcAft>
               <a:defRPr sz="1900">
                 <a:solidFill>
-                  <a:srgbClr val="232323"/>
+                  <a:srgbClr val="1E1E1E"/>
                 </a:solidFill>
               </a:defRPr>
             </a:pPr>
             <a:r>
-              <a:t>Konkrete Objekte sind Ausprägungen dieser Klasse.</a:t>
+              <a:t>Notiere zwei sinnvolle Methoden.</a:t>
+            </a:r>
+          </a:p>
+          <a:p>
+            <a:pPr>
+              <a:spcAft>
+                <a:spcPts val="700"/>
+              </a:spcAft>
+              <a:defRPr sz="1900">
+                <a:solidFill>
+                  <a:srgbClr val="1E1E1E"/>
+                </a:solidFill>
+              </a:defRPr>
+            </a:pPr>
+            <a:r>
+              <a:t>Erkläre Zustand und Verhalten.</a:t>
             </a:r>
           </a:p>
         </p:txBody>
@@ -7621,18 +5879,18 @@
         </p:nvSpPr>
         <p:spPr>
           <a:xfrm>
-            <a:off x="6400800" y="1371600"/>
-            <a:ext cx="1828800" cy="640080"/>
+            <a:off x="6583680" y="1554480"/>
+            <a:ext cx="4297680" cy="2834640"/>
           </a:xfrm>
           <a:prstGeom prst="roundRect">
             <a:avLst/>
           </a:prstGeom>
           <a:solidFill>
-            <a:srgbClr val="DCE6F1"/>
+            <a:srgbClr val="E5ECF6"/>
           </a:solidFill>
           <a:ln>
             <a:solidFill>
-              <a:srgbClr val="4472C4"/>
+              <a:srgbClr val="305396"/>
             </a:solidFill>
           </a:ln>
         </p:spPr>
@@ -7656,344 +5914,30 @@
           <a:p>
             <a:pPr algn="ctr"/>
             <a:r>
-              <a:rPr sz="1600" b="1">
+              <a:rPr sz="1500" b="1">
                 <a:solidFill>
-                  <a:srgbClr val="1F374E"/>
+                  <a:srgbClr val="202C3C"/>
                 </a:solidFill>
               </a:rPr>
-              <a:t>Fahrrad A</a:t>
-            </a:r>
-          </a:p>
-        </p:txBody>
-      </p:sp>
-      <p:sp>
-        <p:nvSpPr>
-          <p:cNvPr id="6" name="Rounded Rectangle 5"/>
-          <p:cNvSpPr/>
-          <p:nvPr/>
-        </p:nvSpPr>
-        <p:spPr>
-          <a:xfrm>
-            <a:off x="8503920" y="1371600"/>
-            <a:ext cx="1828800" cy="640080"/>
-          </a:xfrm>
-          <a:prstGeom prst="roundRect">
-            <a:avLst/>
-          </a:prstGeom>
-          <a:solidFill>
-            <a:srgbClr val="DCE6F1"/>
-          </a:solidFill>
-          <a:ln>
-            <a:solidFill>
-              <a:srgbClr val="4472C4"/>
-            </a:solidFill>
-          </a:ln>
-        </p:spPr>
-        <p:style>
-          <a:lnRef idx="1">
-            <a:schemeClr val="accent1"/>
-          </a:lnRef>
-          <a:fillRef idx="3">
-            <a:schemeClr val="accent1"/>
-          </a:fillRef>
-          <a:effectRef idx="2">
-            <a:schemeClr val="accent1"/>
-          </a:effectRef>
-          <a:fontRef idx="minor">
-            <a:schemeClr val="lt1"/>
-          </a:fontRef>
-        </p:style>
-        <p:txBody>
-          <a:bodyPr rtlCol="0" anchor="ctr" wrap="square"/>
-          <a:lstStyle/>
-          <a:p>
-            <a:pPr algn="ctr"/>
-            <a:r>
-              <a:rPr sz="1600" b="1">
-                <a:solidFill>
-                  <a:srgbClr val="1F374E"/>
-                </a:solidFill>
-              </a:rPr>
-              <a:t>Fahrrad B</a:t>
-            </a:r>
-          </a:p>
-        </p:txBody>
-      </p:sp>
-      <p:sp>
-        <p:nvSpPr>
-          <p:cNvPr id="7" name="Rounded Rectangle 6"/>
-          <p:cNvSpPr/>
-          <p:nvPr/>
-        </p:nvSpPr>
-        <p:spPr>
-          <a:xfrm>
-            <a:off x="6400800" y="2377440"/>
-            <a:ext cx="1828800" cy="502920"/>
-          </a:xfrm>
-          <a:prstGeom prst="roundRect">
-            <a:avLst/>
-          </a:prstGeom>
-          <a:solidFill>
-            <a:srgbClr val="FFE699"/>
-          </a:solidFill>
-          <a:ln>
-            <a:solidFill>
-              <a:srgbClr val="4472C4"/>
-            </a:solidFill>
-          </a:ln>
-        </p:spPr>
-        <p:style>
-          <a:lnRef idx="1">
-            <a:schemeClr val="accent1"/>
-          </a:lnRef>
-          <a:fillRef idx="3">
-            <a:schemeClr val="accent1"/>
-          </a:fillRef>
-          <a:effectRef idx="2">
-            <a:schemeClr val="accent1"/>
-          </a:effectRef>
-          <a:fontRef idx="minor">
-            <a:schemeClr val="lt1"/>
-          </a:fontRef>
-        </p:style>
-        <p:txBody>
-          <a:bodyPr rtlCol="0" anchor="ctr" wrap="square"/>
-          <a:lstStyle/>
-          <a:p>
-            <a:pPr algn="ctr"/>
-            <a:r>
-              <a:rPr sz="1300" b="1">
-                <a:solidFill>
-                  <a:srgbClr val="1F374E"/>
-                </a:solidFill>
-              </a:rPr>
-              <a:t>farbe = rot</a:t>
-            </a:r>
-          </a:p>
-        </p:txBody>
-      </p:sp>
-      <p:sp>
-        <p:nvSpPr>
-          <p:cNvPr id="8" name="Rounded Rectangle 7"/>
-          <p:cNvSpPr/>
-          <p:nvPr/>
-        </p:nvSpPr>
-        <p:spPr>
-          <a:xfrm>
-            <a:off x="8503920" y="2377440"/>
-            <a:ext cx="1828800" cy="502920"/>
-          </a:xfrm>
-          <a:prstGeom prst="roundRect">
-            <a:avLst/>
-          </a:prstGeom>
-          <a:solidFill>
-            <a:srgbClr val="FFE699"/>
-          </a:solidFill>
-          <a:ln>
-            <a:solidFill>
-              <a:srgbClr val="4472C4"/>
-            </a:solidFill>
-          </a:ln>
-        </p:spPr>
-        <p:style>
-          <a:lnRef idx="1">
-            <a:schemeClr val="accent1"/>
-          </a:lnRef>
-          <a:fillRef idx="3">
-            <a:schemeClr val="accent1"/>
-          </a:fillRef>
-          <a:effectRef idx="2">
-            <a:schemeClr val="accent1"/>
-          </a:effectRef>
-          <a:fontRef idx="minor">
-            <a:schemeClr val="lt1"/>
-          </a:fontRef>
-        </p:style>
-        <p:txBody>
-          <a:bodyPr rtlCol="0" anchor="ctr" wrap="square"/>
-          <a:lstStyle/>
-          <a:p>
-            <a:pPr algn="ctr"/>
-            <a:r>
-              <a:rPr sz="1300" b="1">
-                <a:solidFill>
-                  <a:srgbClr val="1F374E"/>
-                </a:solidFill>
-              </a:rPr>
-              <a:t>farbe = blau</a:t>
-            </a:r>
-          </a:p>
-        </p:txBody>
-      </p:sp>
-      <p:sp>
-        <p:nvSpPr>
-          <p:cNvPr id="9" name="Rounded Rectangle 8"/>
-          <p:cNvSpPr/>
-          <p:nvPr/>
-        </p:nvSpPr>
-        <p:spPr>
-          <a:xfrm>
-            <a:off x="6400800" y="3063240"/>
-            <a:ext cx="1828800" cy="502920"/>
-          </a:xfrm>
-          <a:prstGeom prst="roundRect">
-            <a:avLst/>
-          </a:prstGeom>
-          <a:solidFill>
-            <a:srgbClr val="F2F6FA"/>
-          </a:solidFill>
-          <a:ln>
-            <a:solidFill>
-              <a:srgbClr val="4472C4"/>
-            </a:solidFill>
-          </a:ln>
-        </p:spPr>
-        <p:style>
-          <a:lnRef idx="1">
-            <a:schemeClr val="accent1"/>
-          </a:lnRef>
-          <a:fillRef idx="3">
-            <a:schemeClr val="accent1"/>
-          </a:fillRef>
-          <a:effectRef idx="2">
-            <a:schemeClr val="accent1"/>
-          </a:effectRef>
-          <a:fontRef idx="minor">
-            <a:schemeClr val="lt1"/>
-          </a:fontRef>
-        </p:style>
-        <p:txBody>
-          <a:bodyPr rtlCol="0" anchor="ctr" wrap="square"/>
-          <a:lstStyle/>
-          <a:p>
-            <a:pPr algn="ctr"/>
-            <a:r>
-              <a:rPr sz="1300" b="1">
-                <a:solidFill>
-                  <a:srgbClr val="1F374E"/>
-                </a:solidFill>
-              </a:rPr>
-              <a:t>gänge = 7</a:t>
-            </a:r>
-          </a:p>
-        </p:txBody>
-      </p:sp>
-      <p:sp>
-        <p:nvSpPr>
-          <p:cNvPr id="10" name="Rounded Rectangle 9"/>
-          <p:cNvSpPr/>
-          <p:nvPr/>
-        </p:nvSpPr>
-        <p:spPr>
-          <a:xfrm>
-            <a:off x="8503920" y="3063240"/>
-            <a:ext cx="1828800" cy="502920"/>
-          </a:xfrm>
-          <a:prstGeom prst="roundRect">
-            <a:avLst/>
-          </a:prstGeom>
-          <a:solidFill>
-            <a:srgbClr val="F2F6FA"/>
-          </a:solidFill>
-          <a:ln>
-            <a:solidFill>
-              <a:srgbClr val="4472C4"/>
-            </a:solidFill>
-          </a:ln>
-        </p:spPr>
-        <p:style>
-          <a:lnRef idx="1">
-            <a:schemeClr val="accent1"/>
-          </a:lnRef>
-          <a:fillRef idx="3">
-            <a:schemeClr val="accent1"/>
-          </a:fillRef>
-          <a:effectRef idx="2">
-            <a:schemeClr val="accent1"/>
-          </a:effectRef>
-          <a:fontRef idx="minor">
-            <a:schemeClr val="lt1"/>
-          </a:fontRef>
-        </p:style>
-        <p:txBody>
-          <a:bodyPr rtlCol="0" anchor="ctr" wrap="square"/>
-          <a:lstStyle/>
-          <a:p>
-            <a:pPr algn="ctr"/>
-            <a:r>
-              <a:rPr sz="1300" b="1">
-                <a:solidFill>
-                  <a:srgbClr val="1F374E"/>
-                </a:solidFill>
-              </a:rPr>
-              <a:t>gänge = 21</a:t>
-            </a:r>
-          </a:p>
-        </p:txBody>
-      </p:sp>
-      <p:sp>
-        <p:nvSpPr>
-          <p:cNvPr id="11" name="Rounded Rectangle 10"/>
-          <p:cNvSpPr/>
-          <p:nvPr/>
-        </p:nvSpPr>
-        <p:spPr>
-          <a:xfrm>
-            <a:off x="7452360" y="4160520"/>
-            <a:ext cx="2011680" cy="640080"/>
-          </a:xfrm>
-          <a:prstGeom prst="roundRect">
-            <a:avLst/>
-          </a:prstGeom>
-          <a:solidFill>
-            <a:srgbClr val="E2EFDA"/>
-          </a:solidFill>
-          <a:ln>
-            <a:solidFill>
-              <a:srgbClr val="4472C4"/>
-            </a:solidFill>
-          </a:ln>
-        </p:spPr>
-        <p:style>
-          <a:lnRef idx="1">
-            <a:schemeClr val="accent1"/>
-          </a:lnRef>
-          <a:fillRef idx="3">
-            <a:schemeClr val="accent1"/>
-          </a:fillRef>
-          <a:effectRef idx="2">
-            <a:schemeClr val="accent1"/>
-          </a:effectRef>
-          <a:fontRef idx="minor">
-            <a:schemeClr val="lt1"/>
-          </a:fontRef>
-        </p:style>
-        <p:txBody>
-          <a:bodyPr rtlCol="0" anchor="ctr" wrap="square"/>
-          <a:lstStyle/>
-          <a:p>
-            <a:pPr algn="ctr"/>
-            <a:r>
-              <a:rPr sz="1500" b="1">
-                <a:solidFill>
-                  <a:srgbClr val="1F374E"/>
-                </a:solidFill>
-              </a:rPr>
-              <a:t>Klasse Fahrrad</a:t>
-            </a:r>
-          </a:p>
-        </p:txBody>
-      </p:sp>
-      <p:sp>
-        <p:nvSpPr>
-          <p:cNvPr id="12" name="TextBox 11"/>
+              <a:t>Objektkarte
+Klasse: Smartphone
+farbe = schwarz
+speicher = 128 GB
+Methoden: fotografieren(), entsperren()</a:t>
+            </a:r>
+          </a:p>
+        </p:txBody>
+      </p:sp>
+      <p:sp>
+        <p:nvSpPr>
+          <p:cNvPr id="6" name="TextBox 5"/>
           <p:cNvSpPr txBox="1"/>
           <p:nvPr/>
         </p:nvSpPr>
         <p:spPr>
           <a:xfrm>
-            <a:off x="502920" y="6510528"/>
-            <a:ext cx="11064240" cy="182880"/>
+            <a:off x="365760" y="6510528"/>
+            <a:ext cx="11430000" cy="228600"/>
           </a:xfrm>
           <a:prstGeom prst="rect">
             <a:avLst/>
@@ -8010,7 +5954,7 @@
             <a:r>
               <a:rPr sz="800">
                 <a:solidFill>
-                  <a:srgbClr val="646464"/>
+                  <a:srgbClr val="6E6E6E"/>
                 </a:solidFill>
               </a:rPr>
               <a:t>Grafik: eigene Darstellung</a:t>
@@ -8045,13 +5989,13 @@
         <p:spPr>
           <a:xfrm>
             <a:off x="0" y="0"/>
-            <a:ext cx="12191695" cy="100584"/>
+            <a:ext cx="12191695" cy="109728"/>
           </a:xfrm>
           <a:prstGeom prst="rect">
             <a:avLst/>
           </a:prstGeom>
           <a:solidFill>
-            <a:srgbClr val="4472C4"/>
+            <a:srgbClr val="305396"/>
           </a:solidFill>
           <a:ln>
             <a:noFill/>
@@ -8088,7 +6032,7 @@
         <p:spPr>
           <a:xfrm>
             <a:off x="594360" y="320040"/>
-            <a:ext cx="10972800" cy="502920"/>
+            <a:ext cx="10972800" cy="548640"/>
           </a:xfrm>
           <a:prstGeom prst="rect">
             <a:avLst/>
@@ -8104,10 +6048,10 @@
             <a:r>
               <a:rPr sz="2600" b="1">
                 <a:solidFill>
-                  <a:srgbClr val="1F374E"/>
+                  <a:srgbClr val="202C3C"/>
                 </a:solidFill>
               </a:rPr>
-              <a:t>Zustand eines Objekts</a:t>
+              <a:t>Quellen</a:t>
             </a:r>
           </a:p>
         </p:txBody>
@@ -8121,7 +6065,7 @@
         <p:spPr>
           <a:xfrm>
             <a:off x="685800" y="1234440"/>
-            <a:ext cx="5303520" cy="4937760"/>
+            <a:ext cx="5394960" cy="5029200"/>
           </a:xfrm>
           <a:prstGeom prst="rect">
             <a:avLst/>
@@ -8136,264 +6080,45 @@
           <a:p>
             <a:pPr>
               <a:spcAft>
-                <a:spcPts val="800"/>
+                <a:spcPts val="700"/>
               </a:spcAft>
               <a:defRPr sz="1900">
                 <a:solidFill>
-                  <a:srgbClr val="232323"/>
+                  <a:srgbClr val="1E1E1E"/>
                 </a:solidFill>
               </a:defRPr>
             </a:pPr>
             <a:r>
-              <a:t>Der Zustand ergibt sich aus den aktuellen Attributwerten.</a:t>
+              <a:t>Sächsischer Lehrplan Oberschule Informatik, Klassenstufe 8: https://www.schulportal.sachsen.de/lplandb/lehrplan/514</a:t>
             </a:r>
           </a:p>
           <a:p>
             <a:pPr>
               <a:spcAft>
-                <a:spcPts val="800"/>
+                <a:spcPts val="700"/>
               </a:spcAft>
               <a:defRPr sz="1900">
                 <a:solidFill>
-                  <a:srgbClr val="232323"/>
+                  <a:srgbClr val="1E1E1E"/>
                 </a:solidFill>
               </a:defRPr>
             </a:pPr>
             <a:r>
-              <a:t>Zustände können sich ändern.</a:t>
-            </a:r>
-          </a:p>
-          <a:p>
-            <a:pPr>
-              <a:spcAft>
-                <a:spcPts val="800"/>
-              </a:spcAft>
-              <a:defRPr sz="1900">
-                <a:solidFill>
-                  <a:srgbClr val="232323"/>
-                </a:solidFill>
-              </a:defRPr>
-            </a:pPr>
-            <a:r>
-              <a:t>Die Klasse bleibt dabei gleich.</a:t>
-            </a:r>
-          </a:p>
-        </p:txBody>
-      </p:sp>
-      <p:sp>
-        <p:nvSpPr>
-          <p:cNvPr id="5" name="Rounded Rectangle 4"/>
-          <p:cNvSpPr/>
-          <p:nvPr/>
-        </p:nvSpPr>
-        <p:spPr>
-          <a:xfrm>
-            <a:off x="6492240" y="1463040"/>
-            <a:ext cx="1920240" cy="822960"/>
-          </a:xfrm>
-          <a:prstGeom prst="roundRect">
-            <a:avLst/>
-          </a:prstGeom>
-          <a:solidFill>
-            <a:srgbClr val="F2F6FA"/>
-          </a:solidFill>
-          <a:ln>
-            <a:solidFill>
-              <a:srgbClr val="4472C4"/>
-            </a:solidFill>
-          </a:ln>
-        </p:spPr>
-        <p:style>
-          <a:lnRef idx="1">
-            <a:schemeClr val="accent1"/>
-          </a:lnRef>
-          <a:fillRef idx="3">
-            <a:schemeClr val="accent1"/>
-          </a:fillRef>
-          <a:effectRef idx="2">
-            <a:schemeClr val="accent1"/>
-          </a:effectRef>
-          <a:fontRef idx="minor">
-            <a:schemeClr val="lt1"/>
-          </a:fontRef>
-        </p:style>
-        <p:txBody>
-          <a:bodyPr rtlCol="0" anchor="ctr" wrap="square"/>
-          <a:lstStyle/>
-          <a:p>
-            <a:pPr algn="ctr"/>
-            <a:r>
-              <a:rPr sz="1600" b="1">
-                <a:solidFill>
-                  <a:srgbClr val="1F374E"/>
-                </a:solidFill>
-              </a:rPr>
-              <a:t>Lampe
-an = falsch</a:t>
-            </a:r>
-          </a:p>
-        </p:txBody>
-      </p:sp>
-      <p:sp>
-        <p:nvSpPr>
-          <p:cNvPr id="6" name="Right Arrow 5"/>
-          <p:cNvSpPr/>
-          <p:nvPr/>
-        </p:nvSpPr>
-        <p:spPr>
-          <a:xfrm>
-            <a:off x="8595360" y="1691640"/>
-            <a:ext cx="731520" cy="365760"/>
-          </a:xfrm>
-          <a:prstGeom prst="rightArrow">
-            <a:avLst/>
-          </a:prstGeom>
-          <a:solidFill>
-            <a:srgbClr val="4472C4"/>
-          </a:solidFill>
-          <a:ln>
-            <a:noFill/>
-          </a:ln>
-        </p:spPr>
-        <p:style>
-          <a:lnRef idx="1">
-            <a:schemeClr val="accent1"/>
-          </a:lnRef>
-          <a:fillRef idx="3">
-            <a:schemeClr val="accent1"/>
-          </a:fillRef>
-          <a:effectRef idx="2">
-            <a:schemeClr val="accent1"/>
-          </a:effectRef>
-          <a:fontRef idx="minor">
-            <a:schemeClr val="lt1"/>
-          </a:fontRef>
-        </p:style>
-        <p:txBody>
-          <a:bodyPr rtlCol="0" anchor="ctr"/>
-          <a:lstStyle/>
-          <a:p>
-            <a:pPr algn="ctr"/>
-          </a:p>
-        </p:txBody>
-      </p:sp>
-      <p:sp>
-        <p:nvSpPr>
-          <p:cNvPr id="7" name="Rounded Rectangle 6"/>
-          <p:cNvSpPr/>
-          <p:nvPr/>
-        </p:nvSpPr>
-        <p:spPr>
-          <a:xfrm>
-            <a:off x="9509760" y="1463040"/>
-            <a:ext cx="1920240" cy="822960"/>
-          </a:xfrm>
-          <a:prstGeom prst="roundRect">
-            <a:avLst/>
-          </a:prstGeom>
-          <a:solidFill>
-            <a:srgbClr val="FFE699"/>
-          </a:solidFill>
-          <a:ln>
-            <a:solidFill>
-              <a:srgbClr val="4472C4"/>
-            </a:solidFill>
-          </a:ln>
-        </p:spPr>
-        <p:style>
-          <a:lnRef idx="1">
-            <a:schemeClr val="accent1"/>
-          </a:lnRef>
-          <a:fillRef idx="3">
-            <a:schemeClr val="accent1"/>
-          </a:fillRef>
-          <a:effectRef idx="2">
-            <a:schemeClr val="accent1"/>
-          </a:effectRef>
-          <a:fontRef idx="minor">
-            <a:schemeClr val="lt1"/>
-          </a:fontRef>
-        </p:style>
-        <p:txBody>
-          <a:bodyPr rtlCol="0" anchor="ctr" wrap="square"/>
-          <a:lstStyle/>
-          <a:p>
-            <a:pPr algn="ctr"/>
-            <a:r>
-              <a:rPr sz="1600" b="1">
-                <a:solidFill>
-                  <a:srgbClr val="1F374E"/>
-                </a:solidFill>
-              </a:rPr>
-              <a:t>Lampe
-an = wahr</a:t>
-            </a:r>
-          </a:p>
-        </p:txBody>
-      </p:sp>
-      <p:sp>
-        <p:nvSpPr>
-          <p:cNvPr id="8" name="Rounded Rectangle 7"/>
-          <p:cNvSpPr/>
-          <p:nvPr/>
-        </p:nvSpPr>
-        <p:spPr>
-          <a:xfrm>
-            <a:off x="7772400" y="2971800"/>
-            <a:ext cx="2286000" cy="594360"/>
-          </a:xfrm>
-          <a:prstGeom prst="roundRect">
-            <a:avLst/>
-          </a:prstGeom>
-          <a:solidFill>
-            <a:srgbClr val="E2EFDA"/>
-          </a:solidFill>
-          <a:ln>
-            <a:solidFill>
-              <a:srgbClr val="4472C4"/>
-            </a:solidFill>
-          </a:ln>
-        </p:spPr>
-        <p:style>
-          <a:lnRef idx="1">
-            <a:schemeClr val="accent1"/>
-          </a:lnRef>
-          <a:fillRef idx="3">
-            <a:schemeClr val="accent1"/>
-          </a:fillRef>
-          <a:effectRef idx="2">
-            <a:schemeClr val="accent1"/>
-          </a:effectRef>
-          <a:fontRef idx="minor">
-            <a:schemeClr val="lt1"/>
-          </a:fontRef>
-        </p:style>
-        <p:txBody>
-          <a:bodyPr rtlCol="0" anchor="ctr" wrap="square"/>
-          <a:lstStyle/>
-          <a:p>
-            <a:pPr algn="ctr"/>
-            <a:r>
-              <a:rPr sz="1500" b="1">
-                <a:solidFill>
-                  <a:srgbClr val="1F374E"/>
-                </a:solidFill>
-              </a:rPr>
-              <a:t>einschalten()</a:t>
-            </a:r>
-          </a:p>
-        </p:txBody>
-      </p:sp>
-      <p:sp>
-        <p:nvSpPr>
-          <p:cNvPr id="9" name="TextBox 8"/>
+              <a:t>Beispiele und Grafiken: eigene didaktische Darstellung.</a:t>
+            </a:r>
+          </a:p>
+        </p:txBody>
+      </p:sp>
+      <p:sp>
+        <p:nvSpPr>
+          <p:cNvPr id="5" name="TextBox 4"/>
           <p:cNvSpPr txBox="1"/>
           <p:nvPr/>
         </p:nvSpPr>
         <p:spPr>
           <a:xfrm>
-            <a:off x="502920" y="6510528"/>
-            <a:ext cx="11064240" cy="182880"/>
+            <a:off x="365760" y="6510528"/>
+            <a:ext cx="11430000" cy="228600"/>
           </a:xfrm>
           <a:prstGeom prst="rect">
             <a:avLst/>
@@ -8410,662 +6135,10 @@
             <a:r>
               <a:rPr sz="800">
                 <a:solidFill>
-                  <a:srgbClr val="646464"/>
+                  <a:srgbClr val="6E6E6E"/>
                 </a:solidFill>
               </a:rPr>
-              <a:t>Grafik: eigene Darstellung</a:t>
-            </a:r>
-          </a:p>
-        </p:txBody>
-      </p:sp>
-    </p:spTree>
-  </p:cSld>
-  <p:clrMapOvr>
-    <a:masterClrMapping/>
-  </p:clrMapOvr>
-</p:sld>
-</file>
-
-<file path=ppt/slides/slide8.xml><?xml version="1.0" encoding="utf-8"?>
-<p:sld xmlns:a="http://schemas.openxmlformats.org/drawingml/2006/main" xmlns:p="http://schemas.openxmlformats.org/presentationml/2006/main" xmlns:r="http://schemas.openxmlformats.org/officeDocument/2006/relationships">
-  <p:cSld>
-    <p:spTree>
-      <p:nvGrpSpPr>
-        <p:cNvPr id="1" name=""/>
-        <p:cNvGrpSpPr/>
-        <p:nvPr/>
-      </p:nvGrpSpPr>
-      <p:grpSpPr/>
-      <p:sp>
-        <p:nvSpPr>
-          <p:cNvPr id="2" name="Rectangle 1"/>
-          <p:cNvSpPr/>
-          <p:nvPr/>
-        </p:nvSpPr>
-        <p:spPr>
-          <a:xfrm>
-            <a:off x="0" y="0"/>
-            <a:ext cx="12191695" cy="100584"/>
-          </a:xfrm>
-          <a:prstGeom prst="rect">
-            <a:avLst/>
-          </a:prstGeom>
-          <a:solidFill>
-            <a:srgbClr val="4472C4"/>
-          </a:solidFill>
-          <a:ln>
-            <a:noFill/>
-          </a:ln>
-        </p:spPr>
-        <p:style>
-          <a:lnRef idx="1">
-            <a:schemeClr val="accent1"/>
-          </a:lnRef>
-          <a:fillRef idx="3">
-            <a:schemeClr val="accent1"/>
-          </a:fillRef>
-          <a:effectRef idx="2">
-            <a:schemeClr val="accent1"/>
-          </a:effectRef>
-          <a:fontRef idx="minor">
-            <a:schemeClr val="lt1"/>
-          </a:fontRef>
-        </p:style>
-        <p:txBody>
-          <a:bodyPr rtlCol="0" anchor="ctr"/>
-          <a:lstStyle/>
-          <a:p>
-            <a:pPr algn="ctr"/>
-          </a:p>
-        </p:txBody>
-      </p:sp>
-      <p:sp>
-        <p:nvSpPr>
-          <p:cNvPr id="3" name="TextBox 2"/>
-          <p:cNvSpPr txBox="1"/>
-          <p:nvPr/>
-        </p:nvSpPr>
-        <p:spPr>
-          <a:xfrm>
-            <a:off x="594360" y="320040"/>
-            <a:ext cx="10972800" cy="502920"/>
-          </a:xfrm>
-          <a:prstGeom prst="rect">
-            <a:avLst/>
-          </a:prstGeom>
-          <a:noFill/>
-        </p:spPr>
-        <p:txBody>
-          <a:bodyPr wrap="none">
-            <a:spAutoFit/>
-          </a:bodyPr>
-          <a:lstStyle/>
-          <a:p>
-            <a:r>
-              <a:rPr sz="2600" b="1">
-                <a:solidFill>
-                  <a:srgbClr val="1F374E"/>
-                </a:solidFill>
-              </a:rPr>
-              <a:t>Methoden: Was kann ein Objekt tun?</a:t>
-            </a:r>
-          </a:p>
-        </p:txBody>
-      </p:sp>
-      <p:sp>
-        <p:nvSpPr>
-          <p:cNvPr id="4" name="TextBox 3"/>
-          <p:cNvSpPr txBox="1"/>
-          <p:nvPr/>
-        </p:nvSpPr>
-        <p:spPr>
-          <a:xfrm>
-            <a:off x="685800" y="1234440"/>
-            <a:ext cx="5303520" cy="4937760"/>
-          </a:xfrm>
-          <a:prstGeom prst="rect">
-            <a:avLst/>
-          </a:prstGeom>
-          <a:noFill/>
-        </p:spPr>
-        <p:txBody>
-          <a:bodyPr wrap="square">
-            <a:spAutoFit/>
-          </a:bodyPr>
-          <a:lstStyle/>
-          <a:p>
-            <a:pPr>
-              <a:spcAft>
-                <a:spcPts val="800"/>
-              </a:spcAft>
-              <a:defRPr sz="1900">
-                <a:solidFill>
-                  <a:srgbClr val="232323"/>
-                </a:solidFill>
-              </a:defRPr>
-            </a:pPr>
-            <a:r>
-              <a:t>Methoden beschreiben Verhalten oder Aktionen.</a:t>
-            </a:r>
-          </a:p>
-          <a:p>
-            <a:pPr>
-              <a:spcAft>
-                <a:spcPts val="800"/>
-              </a:spcAft>
-              <a:defRPr sz="1900">
-                <a:solidFill>
-                  <a:srgbClr val="232323"/>
-                </a:solidFill>
-              </a:defRPr>
-            </a:pPr>
-            <a:r>
-              <a:t>Methoden können Attributwerte verändern.</a:t>
-            </a:r>
-          </a:p>
-          <a:p>
-            <a:pPr>
-              <a:spcAft>
-                <a:spcPts val="800"/>
-              </a:spcAft>
-              <a:defRPr sz="1900">
-                <a:solidFill>
-                  <a:srgbClr val="232323"/>
-                </a:solidFill>
-              </a:defRPr>
-            </a:pPr>
-            <a:r>
-              <a:t>Beispiele: einschalten(), schalten(), bremsen().</a:t>
-            </a:r>
-          </a:p>
-        </p:txBody>
-      </p:sp>
-      <p:sp>
-        <p:nvSpPr>
-          <p:cNvPr id="5" name="Rounded Rectangle 4"/>
-          <p:cNvSpPr/>
-          <p:nvPr/>
-        </p:nvSpPr>
-        <p:spPr>
-          <a:xfrm>
-            <a:off x="6492240" y="1463040"/>
-            <a:ext cx="1920240" cy="822960"/>
-          </a:xfrm>
-          <a:prstGeom prst="roundRect">
-            <a:avLst/>
-          </a:prstGeom>
-          <a:solidFill>
-            <a:srgbClr val="F2F6FA"/>
-          </a:solidFill>
-          <a:ln>
-            <a:solidFill>
-              <a:srgbClr val="4472C4"/>
-            </a:solidFill>
-          </a:ln>
-        </p:spPr>
-        <p:style>
-          <a:lnRef idx="1">
-            <a:schemeClr val="accent1"/>
-          </a:lnRef>
-          <a:fillRef idx="3">
-            <a:schemeClr val="accent1"/>
-          </a:fillRef>
-          <a:effectRef idx="2">
-            <a:schemeClr val="accent1"/>
-          </a:effectRef>
-          <a:fontRef idx="minor">
-            <a:schemeClr val="lt1"/>
-          </a:fontRef>
-        </p:style>
-        <p:txBody>
-          <a:bodyPr rtlCol="0" anchor="ctr" wrap="square"/>
-          <a:lstStyle/>
-          <a:p>
-            <a:pPr algn="ctr"/>
-            <a:r>
-              <a:rPr sz="1600" b="1">
-                <a:solidFill>
-                  <a:srgbClr val="1F374E"/>
-                </a:solidFill>
-              </a:rPr>
-              <a:t>Lampe
-an = falsch</a:t>
-            </a:r>
-          </a:p>
-        </p:txBody>
-      </p:sp>
-      <p:sp>
-        <p:nvSpPr>
-          <p:cNvPr id="6" name="Right Arrow 5"/>
-          <p:cNvSpPr/>
-          <p:nvPr/>
-        </p:nvSpPr>
-        <p:spPr>
-          <a:xfrm>
-            <a:off x="8595360" y="1691640"/>
-            <a:ext cx="731520" cy="365760"/>
-          </a:xfrm>
-          <a:prstGeom prst="rightArrow">
-            <a:avLst/>
-          </a:prstGeom>
-          <a:solidFill>
-            <a:srgbClr val="4472C4"/>
-          </a:solidFill>
-          <a:ln>
-            <a:noFill/>
-          </a:ln>
-        </p:spPr>
-        <p:style>
-          <a:lnRef idx="1">
-            <a:schemeClr val="accent1"/>
-          </a:lnRef>
-          <a:fillRef idx="3">
-            <a:schemeClr val="accent1"/>
-          </a:fillRef>
-          <a:effectRef idx="2">
-            <a:schemeClr val="accent1"/>
-          </a:effectRef>
-          <a:fontRef idx="minor">
-            <a:schemeClr val="lt1"/>
-          </a:fontRef>
-        </p:style>
-        <p:txBody>
-          <a:bodyPr rtlCol="0" anchor="ctr"/>
-          <a:lstStyle/>
-          <a:p>
-            <a:pPr algn="ctr"/>
-          </a:p>
-        </p:txBody>
-      </p:sp>
-      <p:sp>
-        <p:nvSpPr>
-          <p:cNvPr id="7" name="Rounded Rectangle 6"/>
-          <p:cNvSpPr/>
-          <p:nvPr/>
-        </p:nvSpPr>
-        <p:spPr>
-          <a:xfrm>
-            <a:off x="9509760" y="1463040"/>
-            <a:ext cx="1920240" cy="822960"/>
-          </a:xfrm>
-          <a:prstGeom prst="roundRect">
-            <a:avLst/>
-          </a:prstGeom>
-          <a:solidFill>
-            <a:srgbClr val="FFE699"/>
-          </a:solidFill>
-          <a:ln>
-            <a:solidFill>
-              <a:srgbClr val="4472C4"/>
-            </a:solidFill>
-          </a:ln>
-        </p:spPr>
-        <p:style>
-          <a:lnRef idx="1">
-            <a:schemeClr val="accent1"/>
-          </a:lnRef>
-          <a:fillRef idx="3">
-            <a:schemeClr val="accent1"/>
-          </a:fillRef>
-          <a:effectRef idx="2">
-            <a:schemeClr val="accent1"/>
-          </a:effectRef>
-          <a:fontRef idx="minor">
-            <a:schemeClr val="lt1"/>
-          </a:fontRef>
-        </p:style>
-        <p:txBody>
-          <a:bodyPr rtlCol="0" anchor="ctr" wrap="square"/>
-          <a:lstStyle/>
-          <a:p>
-            <a:pPr algn="ctr"/>
-            <a:r>
-              <a:rPr sz="1600" b="1">
-                <a:solidFill>
-                  <a:srgbClr val="1F374E"/>
-                </a:solidFill>
-              </a:rPr>
-              <a:t>Lampe
-an = wahr</a:t>
-            </a:r>
-          </a:p>
-        </p:txBody>
-      </p:sp>
-      <p:sp>
-        <p:nvSpPr>
-          <p:cNvPr id="8" name="Rounded Rectangle 7"/>
-          <p:cNvSpPr/>
-          <p:nvPr/>
-        </p:nvSpPr>
-        <p:spPr>
-          <a:xfrm>
-            <a:off x="7772400" y="2971800"/>
-            <a:ext cx="2286000" cy="594360"/>
-          </a:xfrm>
-          <a:prstGeom prst="roundRect">
-            <a:avLst/>
-          </a:prstGeom>
-          <a:solidFill>
-            <a:srgbClr val="E2EFDA"/>
-          </a:solidFill>
-          <a:ln>
-            <a:solidFill>
-              <a:srgbClr val="4472C4"/>
-            </a:solidFill>
-          </a:ln>
-        </p:spPr>
-        <p:style>
-          <a:lnRef idx="1">
-            <a:schemeClr val="accent1"/>
-          </a:lnRef>
-          <a:fillRef idx="3">
-            <a:schemeClr val="accent1"/>
-          </a:fillRef>
-          <a:effectRef idx="2">
-            <a:schemeClr val="accent1"/>
-          </a:effectRef>
-          <a:fontRef idx="minor">
-            <a:schemeClr val="lt1"/>
-          </a:fontRef>
-        </p:style>
-        <p:txBody>
-          <a:bodyPr rtlCol="0" anchor="ctr" wrap="square"/>
-          <a:lstStyle/>
-          <a:p>
-            <a:pPr algn="ctr"/>
-            <a:r>
-              <a:rPr sz="1500" b="1">
-                <a:solidFill>
-                  <a:srgbClr val="1F374E"/>
-                </a:solidFill>
-              </a:rPr>
-              <a:t>einschalten()</a:t>
-            </a:r>
-          </a:p>
-        </p:txBody>
-      </p:sp>
-      <p:sp>
-        <p:nvSpPr>
-          <p:cNvPr id="9" name="TextBox 8"/>
-          <p:cNvSpPr txBox="1"/>
-          <p:nvPr/>
-        </p:nvSpPr>
-        <p:spPr>
-          <a:xfrm>
-            <a:off x="502920" y="6510528"/>
-            <a:ext cx="11064240" cy="182880"/>
-          </a:xfrm>
-          <a:prstGeom prst="rect">
-            <a:avLst/>
-          </a:prstGeom>
-          <a:noFill/>
-        </p:spPr>
-        <p:txBody>
-          <a:bodyPr wrap="none">
-            <a:spAutoFit/>
-          </a:bodyPr>
-          <a:lstStyle/>
-          <a:p>
-            <a:pPr algn="r"/>
-            <a:r>
-              <a:rPr sz="800">
-                <a:solidFill>
-                  <a:srgbClr val="646464"/>
-                </a:solidFill>
-              </a:rPr>
-              <a:t>Grafik: eigene Darstellung</a:t>
-            </a:r>
-          </a:p>
-        </p:txBody>
-      </p:sp>
-    </p:spTree>
-  </p:cSld>
-  <p:clrMapOvr>
-    <a:masterClrMapping/>
-  </p:clrMapOvr>
-</p:sld>
-</file>
-
-<file path=ppt/slides/slide9.xml><?xml version="1.0" encoding="utf-8"?>
-<p:sld xmlns:a="http://schemas.openxmlformats.org/drawingml/2006/main" xmlns:p="http://schemas.openxmlformats.org/presentationml/2006/main" xmlns:r="http://schemas.openxmlformats.org/officeDocument/2006/relationships">
-  <p:cSld>
-    <p:spTree>
-      <p:nvGrpSpPr>
-        <p:cNvPr id="1" name=""/>
-        <p:cNvGrpSpPr/>
-        <p:nvPr/>
-      </p:nvGrpSpPr>
-      <p:grpSpPr/>
-      <p:sp>
-        <p:nvSpPr>
-          <p:cNvPr id="2" name="Rectangle 1"/>
-          <p:cNvSpPr/>
-          <p:nvPr/>
-        </p:nvSpPr>
-        <p:spPr>
-          <a:xfrm>
-            <a:off x="0" y="0"/>
-            <a:ext cx="12191695" cy="100584"/>
-          </a:xfrm>
-          <a:prstGeom prst="rect">
-            <a:avLst/>
-          </a:prstGeom>
-          <a:solidFill>
-            <a:srgbClr val="4472C4"/>
-          </a:solidFill>
-          <a:ln>
-            <a:noFill/>
-          </a:ln>
-        </p:spPr>
-        <p:style>
-          <a:lnRef idx="1">
-            <a:schemeClr val="accent1"/>
-          </a:lnRef>
-          <a:fillRef idx="3">
-            <a:schemeClr val="accent1"/>
-          </a:fillRef>
-          <a:effectRef idx="2">
-            <a:schemeClr val="accent1"/>
-          </a:effectRef>
-          <a:fontRef idx="minor">
-            <a:schemeClr val="lt1"/>
-          </a:fontRef>
-        </p:style>
-        <p:txBody>
-          <a:bodyPr rtlCol="0" anchor="ctr"/>
-          <a:lstStyle/>
-          <a:p>
-            <a:pPr algn="ctr"/>
-          </a:p>
-        </p:txBody>
-      </p:sp>
-      <p:sp>
-        <p:nvSpPr>
-          <p:cNvPr id="3" name="TextBox 2"/>
-          <p:cNvSpPr txBox="1"/>
-          <p:nvPr/>
-        </p:nvSpPr>
-        <p:spPr>
-          <a:xfrm>
-            <a:off x="594360" y="320040"/>
-            <a:ext cx="10972800" cy="502920"/>
-          </a:xfrm>
-          <a:prstGeom prst="rect">
-            <a:avLst/>
-          </a:prstGeom>
-          <a:noFill/>
-        </p:spPr>
-        <p:txBody>
-          <a:bodyPr wrap="none">
-            <a:spAutoFit/>
-          </a:bodyPr>
-          <a:lstStyle/>
-          <a:p>
-            <a:r>
-              <a:rPr sz="2600" b="1">
-                <a:solidFill>
-                  <a:srgbClr val="1F374E"/>
-                </a:solidFill>
-              </a:rPr>
-              <a:t>Definition und Ausführung unterscheiden</a:t>
-            </a:r>
-          </a:p>
-        </p:txBody>
-      </p:sp>
-      <p:sp>
-        <p:nvSpPr>
-          <p:cNvPr id="4" name="TextBox 3"/>
-          <p:cNvSpPr txBox="1"/>
-          <p:nvPr/>
-        </p:nvSpPr>
-        <p:spPr>
-          <a:xfrm>
-            <a:off x="685800" y="1234440"/>
-            <a:ext cx="5303520" cy="4937760"/>
-          </a:xfrm>
-          <a:prstGeom prst="rect">
-            <a:avLst/>
-          </a:prstGeom>
-          <a:noFill/>
-        </p:spPr>
-        <p:txBody>
-          <a:bodyPr wrap="square">
-            <a:spAutoFit/>
-          </a:bodyPr>
-          <a:lstStyle/>
-          <a:p>
-            <a:pPr>
-              <a:spcAft>
-                <a:spcPts val="800"/>
-              </a:spcAft>
-              <a:defRPr sz="1900">
-                <a:solidFill>
-                  <a:srgbClr val="232323"/>
-                </a:solidFill>
-              </a:defRPr>
-            </a:pPr>
-            <a:r>
-              <a:t>Eine Methode beschreibt einen Ablauf.</a:t>
-            </a:r>
-          </a:p>
-          <a:p>
-            <a:pPr>
-              <a:spcAft>
-                <a:spcPts val="800"/>
-              </a:spcAft>
-              <a:defRPr sz="1900">
-                <a:solidFill>
-                  <a:srgbClr val="232323"/>
-                </a:solidFill>
-              </a:defRPr>
-            </a:pPr>
-            <a:r>
-              <a:t>Ausgeführt wird sie erst, wenn sie aufgerufen wird.</a:t>
-            </a:r>
-          </a:p>
-          <a:p>
-            <a:pPr>
-              <a:spcAft>
-                <a:spcPts val="800"/>
-              </a:spcAft>
-              <a:defRPr sz="1900">
-                <a:solidFill>
-                  <a:srgbClr val="232323"/>
-                </a:solidFill>
-              </a:defRPr>
-            </a:pPr>
-            <a:r>
-              <a:t>Eine einmal definierte Methode kann mehrfach verwendet werden.</a:t>
-            </a:r>
-          </a:p>
-        </p:txBody>
-      </p:sp>
-      <p:sp>
-        <p:nvSpPr>
-          <p:cNvPr id="5" name="Rectangle 4"/>
-          <p:cNvSpPr/>
-          <p:nvPr/>
-        </p:nvSpPr>
-        <p:spPr>
-          <a:xfrm>
-            <a:off x="6400800" y="1371600"/>
-            <a:ext cx="4754880" cy="3200400"/>
-          </a:xfrm>
-          <a:prstGeom prst="rect">
-            <a:avLst/>
-          </a:prstGeom>
-          <a:solidFill>
-            <a:srgbClr val="FAFAFA"/>
-          </a:solidFill>
-          <a:ln>
-            <a:solidFill>
-              <a:srgbClr val="646464"/>
-            </a:solidFill>
-          </a:ln>
-        </p:spPr>
-        <p:style>
-          <a:lnRef idx="1">
-            <a:schemeClr val="accent1"/>
-          </a:lnRef>
-          <a:fillRef idx="3">
-            <a:schemeClr val="accent1"/>
-          </a:fillRef>
-          <a:effectRef idx="2">
-            <a:schemeClr val="accent1"/>
-          </a:effectRef>
-          <a:fontRef idx="minor">
-            <a:schemeClr val="lt1"/>
-          </a:fontRef>
-        </p:style>
-        <p:txBody>
-          <a:bodyPr rtlCol="0" anchor="ctr" wrap="none"/>
-          <a:lstStyle/>
-          <a:p>
-            <a:pPr algn="ctr"/>
-            <a:r>
-              <a:rPr sz="1500">
-                <a:solidFill>
-                  <a:srgbClr val="232323"/>
-                </a:solidFill>
-                <a:latin typeface="Consolas"/>
-              </a:rPr>
-              <a:t>Definition: einschalten()
-Aufruf 1: einschalten()
-Aufruf 2: einschalten()</a:t>
-            </a:r>
-          </a:p>
-        </p:txBody>
-      </p:sp>
-      <p:sp>
-        <p:nvSpPr>
-          <p:cNvPr id="6" name="TextBox 5"/>
-          <p:cNvSpPr txBox="1"/>
-          <p:nvPr/>
-        </p:nvSpPr>
-        <p:spPr>
-          <a:xfrm>
-            <a:off x="502920" y="6510528"/>
-            <a:ext cx="11064240" cy="182880"/>
-          </a:xfrm>
-          <a:prstGeom prst="rect">
-            <a:avLst/>
-          </a:prstGeom>
-          <a:noFill/>
-        </p:spPr>
-        <p:txBody>
-          <a:bodyPr wrap="none">
-            <a:spAutoFit/>
-          </a:bodyPr>
-          <a:lstStyle/>
-          <a:p>
-            <a:pPr algn="r"/>
-            <a:r>
-              <a:rPr sz="800">
-                <a:solidFill>
-                  <a:srgbClr val="646464"/>
-                </a:solidFill>
-              </a:rPr>
-              <a:t>Grafik: eigene Darstellung</a:t>
+              <a:t>Quellenangaben · Grafiken: eigene Darstellung</a:t>
             </a:r>
           </a:p>
         </p:txBody>
